--- a/Project 2_presentation_SMART #4.pptx
+++ b/Project 2_presentation_SMART #4.pptx
@@ -5,19 +5,16 @@
     <p:sldMasterId id="2147483648" r:id="rId1"/>
   </p:sldMasterIdLst>
   <p:notesMasterIdLst>
-    <p:notesMasterId r:id="rId12"/>
+    <p:notesMasterId r:id="rId9"/>
   </p:notesMasterIdLst>
   <p:sldIdLst>
     <p:sldId id="288" r:id="rId2"/>
-    <p:sldId id="261" r:id="rId3"/>
-    <p:sldId id="257" r:id="rId4"/>
-    <p:sldId id="258" r:id="rId5"/>
-    <p:sldId id="259" r:id="rId6"/>
-    <p:sldId id="260" r:id="rId7"/>
-    <p:sldId id="289" r:id="rId8"/>
-    <p:sldId id="290" r:id="rId9"/>
-    <p:sldId id="291" r:id="rId10"/>
-    <p:sldId id="292" r:id="rId11"/>
+    <p:sldId id="260" r:id="rId3"/>
+    <p:sldId id="289" r:id="rId4"/>
+    <p:sldId id="290" r:id="rId5"/>
+    <p:sldId id="294" r:id="rId6"/>
+    <p:sldId id="291" r:id="rId7"/>
+    <p:sldId id="292" r:id="rId8"/>
   </p:sldIdLst>
   <p:sldSz cx="21388388" cy="15114588"/>
   <p:notesSz cx="15114588" cy="21388388"/>
@@ -255,7 +252,7 @@
       <p15:sldGuideLst xmlns:p15="http://schemas.microsoft.com/office/powerpoint/2012/main"/>
     </p:ext>
     <p:ext uri="GoogleSlidesCustomDataVersion2">
-      <go:slidesCustomData xmlns:go="http://customooxmlschemas.google.com/" xmlns:ahyp="http://schemas.microsoft.com/office/drawing/2018/hyperlinkcolor" xmlns:p15="http://schemas.microsoft.com/office/powerpoint/2012/main" xmlns:p14="http://schemas.microsoft.com/office/powerpoint/2010/main" xmlns:com="http://schemas.openxmlformats.org/drawingml/2006/compatibility" xmlns:pvml="urn:schemas-microsoft-com:office:powerpoint" xmlns:v="urn:schemas-microsoft-com:vml" xmlns:o="urn:schemas-microsoft-com:office:office" xmlns:dgm="http://schemas.openxmlformats.org/drawingml/2006/diagram" xmlns:c="http://schemas.openxmlformats.org/drawingml/2006/chart" xmlns:mv="urn:schemas-microsoft-com:mac:vml" xmlns:mc="http://schemas.openxmlformats.org/markup-compatibility/2006" xmlns="" r:id="rId13" roundtripDataSignature="AMtx7mg8WMx/Q7KB6ZImfuxPZj/si7vz/Q=="/>
+      <go:slidesCustomData xmlns="" xmlns:mc="http://schemas.openxmlformats.org/markup-compatibility/2006" xmlns:mv="urn:schemas-microsoft-com:mac:vml" xmlns:c="http://schemas.openxmlformats.org/drawingml/2006/chart" xmlns:dgm="http://schemas.openxmlformats.org/drawingml/2006/diagram" xmlns:o="urn:schemas-microsoft-com:office:office" xmlns:v="urn:schemas-microsoft-com:vml" xmlns:pvml="urn:schemas-microsoft-com:office:powerpoint" xmlns:com="http://schemas.openxmlformats.org/drawingml/2006/compatibility" xmlns:p14="http://schemas.microsoft.com/office/powerpoint/2010/main" xmlns:p15="http://schemas.microsoft.com/office/powerpoint/2012/main" xmlns:ahyp="http://schemas.microsoft.com/office/drawing/2018/hyperlinkcolor" xmlns:go="http://customooxmlschemas.google.com/" r:id="rId13" roundtripDataSignature="AMtx7mg8WMx/Q7KB6ZImfuxPZj/si7vz/Q=="/>
     </p:ext>
   </p:extLst>
 </p:presentation>
@@ -818,18 +815,12 @@
 </p:notes>
 </file>
 
-<file path=ppt/notesSlides/notesSlide10.xml><?xml version="1.0" encoding="utf-8"?>
+<file path=ppt/notesSlides/notesSlide2.xml><?xml version="1.0" encoding="utf-8"?>
 <p:notes xmlns:a="http://schemas.openxmlformats.org/drawingml/2006/main" xmlns:r="http://schemas.openxmlformats.org/officeDocument/2006/relationships" xmlns:p="http://schemas.openxmlformats.org/presentationml/2006/main" showMasterSp="0" showMasterPhAnim="0">
   <p:cSld>
     <p:spTree>
       <p:nvGrpSpPr>
-        <p:cNvPr id="1" name="Shape 46">
-          <a:extLst>
-            <a:ext uri="{FF2B5EF4-FFF2-40B4-BE49-F238E27FC236}">
-              <a16:creationId xmlns:a16="http://schemas.microsoft.com/office/drawing/2014/main" id="{F78922E0-9319-B2A2-4233-D5DEA3C32C98}"/>
-            </a:ext>
-          </a:extLst>
-        </p:cNvPr>
+        <p:cNvPr id="1" name="Shape 59"/>
         <p:cNvGrpSpPr/>
         <p:nvPr/>
       </p:nvGrpSpPr>
@@ -843,13 +834,7 @@
       </p:grpSpPr>
       <p:sp>
         <p:nvSpPr>
-          <p:cNvPr id="47" name="Google Shape;47;g3ca31053399_0_44:notes">
-            <a:extLst>
-              <a:ext uri="{FF2B5EF4-FFF2-40B4-BE49-F238E27FC236}">
-                <a16:creationId xmlns:a16="http://schemas.microsoft.com/office/drawing/2014/main" id="{9A82FF02-E0F8-0208-4585-BF69379FA275}"/>
-              </a:ext>
-            </a:extLst>
-          </p:cNvPr>
+          <p:cNvPr id="60" name="Google Shape;60;g3ca31053399_0_56:notes"/>
           <p:cNvSpPr>
             <a:spLocks noGrp="1" noRot="1" noChangeAspect="1"/>
           </p:cNvSpPr>
@@ -894,13 +879,7 @@
       </p:sp>
       <p:sp>
         <p:nvSpPr>
-          <p:cNvPr id="48" name="Google Shape;48;g3ca31053399_0_44:notes">
-            <a:extLst>
-              <a:ext uri="{FF2B5EF4-FFF2-40B4-BE49-F238E27FC236}">
-                <a16:creationId xmlns:a16="http://schemas.microsoft.com/office/drawing/2014/main" id="{D79F47B0-ADE7-0E76-EDB5-A04BB3E8CD53}"/>
-              </a:ext>
-            </a:extLst>
-          </p:cNvPr>
+          <p:cNvPr id="61" name="Google Shape;61;g3ca31053399_0_56:notes"/>
           <p:cNvSpPr txBox="1">
             <a:spLocks noGrp="1"/>
           </p:cNvSpPr>
@@ -950,13 +929,7 @@
       </p:sp>
       <p:sp>
         <p:nvSpPr>
-          <p:cNvPr id="49" name="Google Shape;49;g3ca31053399_0_44:notes">
-            <a:extLst>
-              <a:ext uri="{FF2B5EF4-FFF2-40B4-BE49-F238E27FC236}">
-                <a16:creationId xmlns:a16="http://schemas.microsoft.com/office/drawing/2014/main" id="{1C9B7F8D-EFBD-7562-B48B-D3D484E90AA9}"/>
-              </a:ext>
-            </a:extLst>
-          </p:cNvPr>
+          <p:cNvPr id="62" name="Google Shape;62;g3ca31053399_0_56:notes"/>
           <p:cNvSpPr txBox="1">
             <a:spLocks noGrp="1"/>
           </p:cNvSpPr>
@@ -1002,7 +975,7 @@
                 <a:cs typeface="Calibri"/>
                 <a:sym typeface="Calibri"/>
               </a:rPr>
-              <a:t>10</a:t>
+              <a:t>2</a:t>
             </a:fld>
             <a:endParaRPr sz="1800">
               <a:solidFill>
@@ -1017,11 +990,6 @@
         </p:txBody>
       </p:sp>
     </p:spTree>
-    <p:extLst>
-      <p:ext uri="{BB962C8B-B14F-4D97-AF65-F5344CB8AC3E}">
-        <p14:creationId xmlns:p14="http://schemas.microsoft.com/office/powerpoint/2010/main" val="2702910482"/>
-      </p:ext>
-    </p:extLst>
   </p:cSld>
   <p:clrMapOvr>
     <a:masterClrMapping/>
@@ -1029,12 +997,18 @@
 </p:notes>
 </file>
 
-<file path=ppt/notesSlides/notesSlide2.xml><?xml version="1.0" encoding="utf-8"?>
+<file path=ppt/notesSlides/notesSlide3.xml><?xml version="1.0" encoding="utf-8"?>
 <p:notes xmlns:a="http://schemas.openxmlformats.org/drawingml/2006/main" xmlns:r="http://schemas.openxmlformats.org/officeDocument/2006/relationships" xmlns:p="http://schemas.openxmlformats.org/presentationml/2006/main" showMasterSp="0" showMasterPhAnim="0">
   <p:cSld>
     <p:spTree>
       <p:nvGrpSpPr>
-        <p:cNvPr id="1" name="Shape 72"/>
+        <p:cNvPr id="1" name="Shape 59">
+          <a:extLst>
+            <a:ext uri="{FF2B5EF4-FFF2-40B4-BE49-F238E27FC236}">
+              <a16:creationId xmlns:a16="http://schemas.microsoft.com/office/drawing/2014/main" id="{ACD8F1F1-6753-AF92-10BE-BD0CD0A8AB53}"/>
+            </a:ext>
+          </a:extLst>
+        </p:cNvPr>
         <p:cNvGrpSpPr/>
         <p:nvPr/>
       </p:nvGrpSpPr>
@@ -1048,7 +1022,13 @@
       </p:grpSpPr>
       <p:sp>
         <p:nvSpPr>
-          <p:cNvPr id="73" name="Google Shape;73;g3ca31053399_0_68:notes"/>
+          <p:cNvPr id="60" name="Google Shape;60;g3ca31053399_0_56:notes">
+            <a:extLst>
+              <a:ext uri="{FF2B5EF4-FFF2-40B4-BE49-F238E27FC236}">
+                <a16:creationId xmlns:a16="http://schemas.microsoft.com/office/drawing/2014/main" id="{CC505D93-97D0-75C4-91CD-BA56FC36E98F}"/>
+              </a:ext>
+            </a:extLst>
+          </p:cNvPr>
           <p:cNvSpPr>
             <a:spLocks noGrp="1" noRot="1" noChangeAspect="1"/>
           </p:cNvSpPr>
@@ -1093,7 +1073,13 @@
       </p:sp>
       <p:sp>
         <p:nvSpPr>
-          <p:cNvPr id="74" name="Google Shape;74;g3ca31053399_0_68:notes"/>
+          <p:cNvPr id="61" name="Google Shape;61;g3ca31053399_0_56:notes">
+            <a:extLst>
+              <a:ext uri="{FF2B5EF4-FFF2-40B4-BE49-F238E27FC236}">
+                <a16:creationId xmlns:a16="http://schemas.microsoft.com/office/drawing/2014/main" id="{8B0E014A-F693-FB98-676A-27A935004AD5}"/>
+              </a:ext>
+            </a:extLst>
+          </p:cNvPr>
           <p:cNvSpPr txBox="1">
             <a:spLocks noGrp="1"/>
           </p:cNvSpPr>
@@ -1143,7 +1129,13 @@
       </p:sp>
       <p:sp>
         <p:nvSpPr>
-          <p:cNvPr id="75" name="Google Shape;75;g3ca31053399_0_68:notes"/>
+          <p:cNvPr id="62" name="Google Shape;62;g3ca31053399_0_56:notes">
+            <a:extLst>
+              <a:ext uri="{FF2B5EF4-FFF2-40B4-BE49-F238E27FC236}">
+                <a16:creationId xmlns:a16="http://schemas.microsoft.com/office/drawing/2014/main" id="{1B5F5BAA-A375-91FD-71C4-338751FCA72D}"/>
+              </a:ext>
+            </a:extLst>
+          </p:cNvPr>
           <p:cNvSpPr txBox="1">
             <a:spLocks noGrp="1"/>
           </p:cNvSpPr>
@@ -1189,7 +1181,7 @@
                 <a:cs typeface="Calibri"/>
                 <a:sym typeface="Calibri"/>
               </a:rPr>
-              <a:t>2</a:t>
+              <a:t>3</a:t>
             </a:fld>
             <a:endParaRPr sz="1800">
               <a:solidFill>
@@ -1204,6 +1196,11 @@
         </p:txBody>
       </p:sp>
     </p:spTree>
+    <p:extLst>
+      <p:ext uri="{BB962C8B-B14F-4D97-AF65-F5344CB8AC3E}">
+        <p14:creationId xmlns:p14="http://schemas.microsoft.com/office/powerpoint/2010/main" val="2455909827"/>
+      </p:ext>
+    </p:extLst>
   </p:cSld>
   <p:clrMapOvr>
     <a:masterClrMapping/>
@@ -1211,12 +1208,18 @@
 </p:notes>
 </file>
 
-<file path=ppt/notesSlides/notesSlide3.xml><?xml version="1.0" encoding="utf-8"?>
+<file path=ppt/notesSlides/notesSlide4.xml><?xml version="1.0" encoding="utf-8"?>
 <p:notes xmlns:a="http://schemas.openxmlformats.org/drawingml/2006/main" xmlns:r="http://schemas.openxmlformats.org/officeDocument/2006/relationships" xmlns:p="http://schemas.openxmlformats.org/presentationml/2006/main" showMasterSp="0" showMasterPhAnim="0">
   <p:cSld>
     <p:spTree>
       <p:nvGrpSpPr>
-        <p:cNvPr id="1" name="Shape 20"/>
+        <p:cNvPr id="1" name="Shape 59">
+          <a:extLst>
+            <a:ext uri="{FF2B5EF4-FFF2-40B4-BE49-F238E27FC236}">
+              <a16:creationId xmlns:a16="http://schemas.microsoft.com/office/drawing/2014/main" id="{A56A8589-A313-D1CE-B55E-42429D1BFAEF}"/>
+            </a:ext>
+          </a:extLst>
+        </p:cNvPr>
         <p:cNvGrpSpPr/>
         <p:nvPr/>
       </p:nvGrpSpPr>
@@ -1230,7 +1233,13 @@
       </p:grpSpPr>
       <p:sp>
         <p:nvSpPr>
-          <p:cNvPr id="21" name="Google Shape;21;g3ca31053399_0_20:notes"/>
+          <p:cNvPr id="60" name="Google Shape;60;g3ca31053399_0_56:notes">
+            <a:extLst>
+              <a:ext uri="{FF2B5EF4-FFF2-40B4-BE49-F238E27FC236}">
+                <a16:creationId xmlns:a16="http://schemas.microsoft.com/office/drawing/2014/main" id="{C01C3203-C590-E1A2-594E-F8B1353AD5A8}"/>
+              </a:ext>
+            </a:extLst>
+          </p:cNvPr>
           <p:cNvSpPr>
             <a:spLocks noGrp="1" noRot="1" noChangeAspect="1"/>
           </p:cNvSpPr>
@@ -1275,7 +1284,13 @@
       </p:sp>
       <p:sp>
         <p:nvSpPr>
-          <p:cNvPr id="22" name="Google Shape;22;g3ca31053399_0_20:notes"/>
+          <p:cNvPr id="61" name="Google Shape;61;g3ca31053399_0_56:notes">
+            <a:extLst>
+              <a:ext uri="{FF2B5EF4-FFF2-40B4-BE49-F238E27FC236}">
+                <a16:creationId xmlns:a16="http://schemas.microsoft.com/office/drawing/2014/main" id="{68B8FD2F-4A63-40E0-D3C0-95EF97117895}"/>
+              </a:ext>
+            </a:extLst>
+          </p:cNvPr>
           <p:cNvSpPr txBox="1">
             <a:spLocks noGrp="1"/>
           </p:cNvSpPr>
@@ -1325,7 +1340,13 @@
       </p:sp>
       <p:sp>
         <p:nvSpPr>
-          <p:cNvPr id="23" name="Google Shape;23;g3ca31053399_0_20:notes"/>
+          <p:cNvPr id="62" name="Google Shape;62;g3ca31053399_0_56:notes">
+            <a:extLst>
+              <a:ext uri="{FF2B5EF4-FFF2-40B4-BE49-F238E27FC236}">
+                <a16:creationId xmlns:a16="http://schemas.microsoft.com/office/drawing/2014/main" id="{BBD82AFF-F3F3-2EDD-5982-06C8C4D3374C}"/>
+              </a:ext>
+            </a:extLst>
+          </p:cNvPr>
           <p:cNvSpPr txBox="1">
             <a:spLocks noGrp="1"/>
           </p:cNvSpPr>
@@ -1371,7 +1392,7 @@
                 <a:cs typeface="Calibri"/>
                 <a:sym typeface="Calibri"/>
               </a:rPr>
-              <a:t>3</a:t>
+              <a:t>4</a:t>
             </a:fld>
             <a:endParaRPr sz="1800">
               <a:solidFill>
@@ -1386,6 +1407,11 @@
         </p:txBody>
       </p:sp>
     </p:spTree>
+    <p:extLst>
+      <p:ext uri="{BB962C8B-B14F-4D97-AF65-F5344CB8AC3E}">
+        <p14:creationId xmlns:p14="http://schemas.microsoft.com/office/powerpoint/2010/main" val="2030972843"/>
+      </p:ext>
+    </p:extLst>
   </p:cSld>
   <p:clrMapOvr>
     <a:masterClrMapping/>
@@ -1393,12 +1419,18 @@
 </p:notes>
 </file>
 
-<file path=ppt/notesSlides/notesSlide4.xml><?xml version="1.0" encoding="utf-8"?>
+<file path=ppt/notesSlides/notesSlide5.xml><?xml version="1.0" encoding="utf-8"?>
 <p:notes xmlns:a="http://schemas.openxmlformats.org/drawingml/2006/main" xmlns:r="http://schemas.openxmlformats.org/officeDocument/2006/relationships" xmlns:p="http://schemas.openxmlformats.org/presentationml/2006/main" showMasterSp="0" showMasterPhAnim="0">
   <p:cSld>
     <p:spTree>
       <p:nvGrpSpPr>
-        <p:cNvPr id="1" name="Shape 33"/>
+        <p:cNvPr id="1" name="Shape 59">
+          <a:extLst>
+            <a:ext uri="{FF2B5EF4-FFF2-40B4-BE49-F238E27FC236}">
+              <a16:creationId xmlns:a16="http://schemas.microsoft.com/office/drawing/2014/main" id="{1ED7C4F7-C78B-0F34-70AE-9BA8140BF643}"/>
+            </a:ext>
+          </a:extLst>
+        </p:cNvPr>
         <p:cNvGrpSpPr/>
         <p:nvPr/>
       </p:nvGrpSpPr>
@@ -1412,7 +1444,13 @@
       </p:grpSpPr>
       <p:sp>
         <p:nvSpPr>
-          <p:cNvPr id="34" name="Google Shape;34;g3ca31053399_0_80:notes"/>
+          <p:cNvPr id="60" name="Google Shape;60;g3ca31053399_0_56:notes">
+            <a:extLst>
+              <a:ext uri="{FF2B5EF4-FFF2-40B4-BE49-F238E27FC236}">
+                <a16:creationId xmlns:a16="http://schemas.microsoft.com/office/drawing/2014/main" id="{A7C562F0-A368-0579-00FC-C663BD35B07F}"/>
+              </a:ext>
+            </a:extLst>
+          </p:cNvPr>
           <p:cNvSpPr>
             <a:spLocks noGrp="1" noRot="1" noChangeAspect="1"/>
           </p:cNvSpPr>
@@ -1457,7 +1495,13 @@
       </p:sp>
       <p:sp>
         <p:nvSpPr>
-          <p:cNvPr id="35" name="Google Shape;35;g3ca31053399_0_80:notes"/>
+          <p:cNvPr id="61" name="Google Shape;61;g3ca31053399_0_56:notes">
+            <a:extLst>
+              <a:ext uri="{FF2B5EF4-FFF2-40B4-BE49-F238E27FC236}">
+                <a16:creationId xmlns:a16="http://schemas.microsoft.com/office/drawing/2014/main" id="{9D7CFCD0-EEAB-7A51-0339-AA77E2511BC4}"/>
+              </a:ext>
+            </a:extLst>
+          </p:cNvPr>
           <p:cNvSpPr txBox="1">
             <a:spLocks noGrp="1"/>
           </p:cNvSpPr>
@@ -1507,7 +1551,13 @@
       </p:sp>
       <p:sp>
         <p:nvSpPr>
-          <p:cNvPr id="36" name="Google Shape;36;g3ca31053399_0_80:notes"/>
+          <p:cNvPr id="62" name="Google Shape;62;g3ca31053399_0_56:notes">
+            <a:extLst>
+              <a:ext uri="{FF2B5EF4-FFF2-40B4-BE49-F238E27FC236}">
+                <a16:creationId xmlns:a16="http://schemas.microsoft.com/office/drawing/2014/main" id="{29136FAB-E410-8D10-5E7A-DD79F3760CA4}"/>
+              </a:ext>
+            </a:extLst>
+          </p:cNvPr>
           <p:cNvSpPr txBox="1">
             <a:spLocks noGrp="1"/>
           </p:cNvSpPr>
@@ -1553,7 +1603,7 @@
                 <a:cs typeface="Calibri"/>
                 <a:sym typeface="Calibri"/>
               </a:rPr>
-              <a:t>4</a:t>
+              <a:t>5</a:t>
             </a:fld>
             <a:endParaRPr sz="1800">
               <a:solidFill>
@@ -1568,6 +1618,11 @@
         </p:txBody>
       </p:sp>
     </p:spTree>
+    <p:extLst>
+      <p:ext uri="{BB962C8B-B14F-4D97-AF65-F5344CB8AC3E}">
+        <p14:creationId xmlns:p14="http://schemas.microsoft.com/office/powerpoint/2010/main" val="2072353964"/>
+      </p:ext>
+    </p:extLst>
   </p:cSld>
   <p:clrMapOvr>
     <a:masterClrMapping/>
@@ -1575,12 +1630,18 @@
 </p:notes>
 </file>
 
-<file path=ppt/notesSlides/notesSlide5.xml><?xml version="1.0" encoding="utf-8"?>
+<file path=ppt/notesSlides/notesSlide6.xml><?xml version="1.0" encoding="utf-8"?>
 <p:notes xmlns:a="http://schemas.openxmlformats.org/drawingml/2006/main" xmlns:r="http://schemas.openxmlformats.org/officeDocument/2006/relationships" xmlns:p="http://schemas.openxmlformats.org/presentationml/2006/main" showMasterSp="0" showMasterPhAnim="0">
   <p:cSld>
     <p:spTree>
       <p:nvGrpSpPr>
-        <p:cNvPr id="1" name="Shape 46"/>
+        <p:cNvPr id="1" name="Shape 46">
+          <a:extLst>
+            <a:ext uri="{FF2B5EF4-FFF2-40B4-BE49-F238E27FC236}">
+              <a16:creationId xmlns:a16="http://schemas.microsoft.com/office/drawing/2014/main" id="{819D9229-BEA0-652B-4BA4-673CD3393FAF}"/>
+            </a:ext>
+          </a:extLst>
+        </p:cNvPr>
         <p:cNvGrpSpPr/>
         <p:nvPr/>
       </p:nvGrpSpPr>
@@ -1594,7 +1655,13 @@
       </p:grpSpPr>
       <p:sp>
         <p:nvSpPr>
-          <p:cNvPr id="47" name="Google Shape;47;g3ca31053399_0_44:notes"/>
+          <p:cNvPr id="47" name="Google Shape;47;g3ca31053399_0_44:notes">
+            <a:extLst>
+              <a:ext uri="{FF2B5EF4-FFF2-40B4-BE49-F238E27FC236}">
+                <a16:creationId xmlns:a16="http://schemas.microsoft.com/office/drawing/2014/main" id="{19794C44-C80A-9A1D-738F-03A6E1D3D58B}"/>
+              </a:ext>
+            </a:extLst>
+          </p:cNvPr>
           <p:cNvSpPr>
             <a:spLocks noGrp="1" noRot="1" noChangeAspect="1"/>
           </p:cNvSpPr>
@@ -1639,7 +1706,13 @@
       </p:sp>
       <p:sp>
         <p:nvSpPr>
-          <p:cNvPr id="48" name="Google Shape;48;g3ca31053399_0_44:notes"/>
+          <p:cNvPr id="48" name="Google Shape;48;g3ca31053399_0_44:notes">
+            <a:extLst>
+              <a:ext uri="{FF2B5EF4-FFF2-40B4-BE49-F238E27FC236}">
+                <a16:creationId xmlns:a16="http://schemas.microsoft.com/office/drawing/2014/main" id="{B16EB5EA-FEB5-A474-974C-50EEA6D7C30D}"/>
+              </a:ext>
+            </a:extLst>
+          </p:cNvPr>
           <p:cNvSpPr txBox="1">
             <a:spLocks noGrp="1"/>
           </p:cNvSpPr>
@@ -1689,7 +1762,13 @@
       </p:sp>
       <p:sp>
         <p:nvSpPr>
-          <p:cNvPr id="49" name="Google Shape;49;g3ca31053399_0_44:notes"/>
+          <p:cNvPr id="49" name="Google Shape;49;g3ca31053399_0_44:notes">
+            <a:extLst>
+              <a:ext uri="{FF2B5EF4-FFF2-40B4-BE49-F238E27FC236}">
+                <a16:creationId xmlns:a16="http://schemas.microsoft.com/office/drawing/2014/main" id="{FB159903-DEDD-6131-C58B-2DE94E805C33}"/>
+              </a:ext>
+            </a:extLst>
+          </p:cNvPr>
           <p:cNvSpPr txBox="1">
             <a:spLocks noGrp="1"/>
           </p:cNvSpPr>
@@ -1735,7 +1814,7 @@
                 <a:cs typeface="Calibri"/>
                 <a:sym typeface="Calibri"/>
               </a:rPr>
-              <a:t>5</a:t>
+              <a:t>6</a:t>
             </a:fld>
             <a:endParaRPr sz="1800">
               <a:solidFill>
@@ -1750,6 +1829,11 @@
         </p:txBody>
       </p:sp>
     </p:spTree>
+    <p:extLst>
+      <p:ext uri="{BB962C8B-B14F-4D97-AF65-F5344CB8AC3E}">
+        <p14:creationId xmlns:p14="http://schemas.microsoft.com/office/powerpoint/2010/main" val="1757847960"/>
+      </p:ext>
+    </p:extLst>
   </p:cSld>
   <p:clrMapOvr>
     <a:masterClrMapping/>
@@ -1757,12 +1841,18 @@
 </p:notes>
 </file>
 
-<file path=ppt/notesSlides/notesSlide6.xml><?xml version="1.0" encoding="utf-8"?>
+<file path=ppt/notesSlides/notesSlide7.xml><?xml version="1.0" encoding="utf-8"?>
 <p:notes xmlns:a="http://schemas.openxmlformats.org/drawingml/2006/main" xmlns:r="http://schemas.openxmlformats.org/officeDocument/2006/relationships" xmlns:p="http://schemas.openxmlformats.org/presentationml/2006/main" showMasterSp="0" showMasterPhAnim="0">
   <p:cSld>
     <p:spTree>
       <p:nvGrpSpPr>
-        <p:cNvPr id="1" name="Shape 59"/>
+        <p:cNvPr id="1" name="Shape 46">
+          <a:extLst>
+            <a:ext uri="{FF2B5EF4-FFF2-40B4-BE49-F238E27FC236}">
+              <a16:creationId xmlns:a16="http://schemas.microsoft.com/office/drawing/2014/main" id="{F78922E0-9319-B2A2-4233-D5DEA3C32C98}"/>
+            </a:ext>
+          </a:extLst>
+        </p:cNvPr>
         <p:cNvGrpSpPr/>
         <p:nvPr/>
       </p:nvGrpSpPr>
@@ -1776,7 +1866,13 @@
       </p:grpSpPr>
       <p:sp>
         <p:nvSpPr>
-          <p:cNvPr id="60" name="Google Shape;60;g3ca31053399_0_56:notes"/>
+          <p:cNvPr id="47" name="Google Shape;47;g3ca31053399_0_44:notes">
+            <a:extLst>
+              <a:ext uri="{FF2B5EF4-FFF2-40B4-BE49-F238E27FC236}">
+                <a16:creationId xmlns:a16="http://schemas.microsoft.com/office/drawing/2014/main" id="{9A82FF02-E0F8-0208-4585-BF69379FA275}"/>
+              </a:ext>
+            </a:extLst>
+          </p:cNvPr>
           <p:cNvSpPr>
             <a:spLocks noGrp="1" noRot="1" noChangeAspect="1"/>
           </p:cNvSpPr>
@@ -1821,7 +1917,13 @@
       </p:sp>
       <p:sp>
         <p:nvSpPr>
-          <p:cNvPr id="61" name="Google Shape;61;g3ca31053399_0_56:notes"/>
+          <p:cNvPr id="48" name="Google Shape;48;g3ca31053399_0_44:notes">
+            <a:extLst>
+              <a:ext uri="{FF2B5EF4-FFF2-40B4-BE49-F238E27FC236}">
+                <a16:creationId xmlns:a16="http://schemas.microsoft.com/office/drawing/2014/main" id="{D79F47B0-ADE7-0E76-EDB5-A04BB3E8CD53}"/>
+              </a:ext>
+            </a:extLst>
+          </p:cNvPr>
           <p:cNvSpPr txBox="1">
             <a:spLocks noGrp="1"/>
           </p:cNvSpPr>
@@ -1871,210 +1973,10 @@
       </p:sp>
       <p:sp>
         <p:nvSpPr>
-          <p:cNvPr id="62" name="Google Shape;62;g3ca31053399_0_56:notes"/>
-          <p:cNvSpPr txBox="1">
-            <a:spLocks noGrp="1"/>
-          </p:cNvSpPr>
-          <p:nvPr>
-            <p:ph type="sldNum" idx="12"/>
-          </p:nvPr>
-        </p:nvSpPr>
-        <p:spPr>
-          <a:xfrm>
-            <a:off x="0" y="0"/>
-            <a:ext cx="3000000" cy="3000000"/>
-          </a:xfrm>
-          <a:prstGeom prst="rect">
-            <a:avLst/>
-          </a:prstGeom>
-          <a:noFill/>
-          <a:ln>
-            <a:noFill/>
-          </a:ln>
-        </p:spPr>
-        <p:txBody>
-          <a:bodyPr spcFirstLastPara="1" wrap="square" lIns="91425" tIns="45700" rIns="91425" bIns="45700" anchor="t" anchorCtr="0">
-            <a:noAutofit/>
-          </a:bodyPr>
-          <a:lstStyle/>
-          <a:p>
-            <a:pPr marL="0" marR="0" lvl="0" indent="0" algn="l" rtl="0">
-              <a:spcBef>
-                <a:spcPts val="0"/>
-              </a:spcBef>
-              <a:spcAft>
-                <a:spcPts val="0"/>
-              </a:spcAft>
-              <a:buNone/>
-            </a:pPr>
-            <a:fld id="{00000000-1234-1234-1234-123412341234}" type="slidenum">
-              <a:rPr lang="en-US" sz="1800" b="0" i="0" u="none" strike="noStrike" cap="none">
-                <a:solidFill>
-                  <a:schemeClr val="dk1"/>
-                </a:solidFill>
-                <a:latin typeface="Calibri"/>
-                <a:ea typeface="Calibri"/>
-                <a:cs typeface="Calibri"/>
-                <a:sym typeface="Calibri"/>
-              </a:rPr>
-              <a:t>6</a:t>
-            </a:fld>
-            <a:endParaRPr sz="1800">
-              <a:solidFill>
-                <a:schemeClr val="dk1"/>
-              </a:solidFill>
-              <a:latin typeface="Calibri"/>
-              <a:ea typeface="Calibri"/>
-              <a:cs typeface="Calibri"/>
-              <a:sym typeface="Calibri"/>
-            </a:endParaRPr>
-          </a:p>
-        </p:txBody>
-      </p:sp>
-    </p:spTree>
-  </p:cSld>
-  <p:clrMapOvr>
-    <a:masterClrMapping/>
-  </p:clrMapOvr>
-</p:notes>
-</file>
-
-<file path=ppt/notesSlides/notesSlide7.xml><?xml version="1.0" encoding="utf-8"?>
-<p:notes xmlns:a="http://schemas.openxmlformats.org/drawingml/2006/main" xmlns:r="http://schemas.openxmlformats.org/officeDocument/2006/relationships" xmlns:p="http://schemas.openxmlformats.org/presentationml/2006/main" showMasterSp="0" showMasterPhAnim="0">
-  <p:cSld>
-    <p:spTree>
-      <p:nvGrpSpPr>
-        <p:cNvPr id="1" name="Shape 59">
-          <a:extLst>
-            <a:ext uri="{FF2B5EF4-FFF2-40B4-BE49-F238E27FC236}">
-              <a16:creationId xmlns:a16="http://schemas.microsoft.com/office/drawing/2014/main" id="{ACD8F1F1-6753-AF92-10BE-BD0CD0A8AB53}"/>
-            </a:ext>
-          </a:extLst>
-        </p:cNvPr>
-        <p:cNvGrpSpPr/>
-        <p:nvPr/>
-      </p:nvGrpSpPr>
-      <p:grpSpPr>
-        <a:xfrm>
-          <a:off x="0" y="0"/>
-          <a:ext cx="0" cy="0"/>
-          <a:chOff x="0" y="0"/>
-          <a:chExt cx="0" cy="0"/>
-        </a:xfrm>
-      </p:grpSpPr>
-      <p:sp>
-        <p:nvSpPr>
-          <p:cNvPr id="60" name="Google Shape;60;g3ca31053399_0_56:notes">
-            <a:extLst>
-              <a:ext uri="{FF2B5EF4-FFF2-40B4-BE49-F238E27FC236}">
-                <a16:creationId xmlns:a16="http://schemas.microsoft.com/office/drawing/2014/main" id="{CC505D93-97D0-75C4-91CD-BA56FC36E98F}"/>
-              </a:ext>
-            </a:extLst>
-          </p:cNvPr>
-          <p:cNvSpPr>
-            <a:spLocks noGrp="1" noRot="1" noChangeAspect="1"/>
-          </p:cNvSpPr>
-          <p:nvPr>
-            <p:ph type="sldImg" idx="2"/>
-          </p:nvPr>
-        </p:nvSpPr>
-        <p:spPr>
-          <a:xfrm>
-            <a:off x="-622300" y="0"/>
-            <a:ext cx="4244975" cy="3000375"/>
-          </a:xfrm>
-          <a:custGeom>
-            <a:avLst/>
-            <a:gdLst/>
-            <a:ahLst/>
-            <a:cxnLst/>
-            <a:rect l="l" t="t" r="r" b="b"/>
-            <a:pathLst>
-              <a:path w="120000" h="120000" extrusionOk="0">
-                <a:moveTo>
-                  <a:pt x="0" y="0"/>
-                </a:moveTo>
-                <a:lnTo>
-                  <a:pt x="120000" y="0"/>
-                </a:lnTo>
-                <a:lnTo>
-                  <a:pt x="120000" y="120000"/>
-                </a:lnTo>
-                <a:lnTo>
-                  <a:pt x="0" y="120000"/>
-                </a:lnTo>
-                <a:close/>
-              </a:path>
-            </a:pathLst>
-          </a:custGeom>
-          <a:noFill/>
-          <a:ln>
-            <a:noFill/>
-          </a:ln>
-        </p:spPr>
-      </p:sp>
-      <p:sp>
-        <p:nvSpPr>
-          <p:cNvPr id="61" name="Google Shape;61;g3ca31053399_0_56:notes">
-            <a:extLst>
-              <a:ext uri="{FF2B5EF4-FFF2-40B4-BE49-F238E27FC236}">
-                <a16:creationId xmlns:a16="http://schemas.microsoft.com/office/drawing/2014/main" id="{8B0E014A-F693-FB98-676A-27A935004AD5}"/>
-              </a:ext>
-            </a:extLst>
-          </p:cNvPr>
-          <p:cNvSpPr txBox="1">
-            <a:spLocks noGrp="1"/>
-          </p:cNvSpPr>
-          <p:nvPr>
-            <p:ph type="body" idx="1"/>
-          </p:nvPr>
-        </p:nvSpPr>
-        <p:spPr>
-          <a:xfrm>
-            <a:off x="0" y="0"/>
-            <a:ext cx="3000000" cy="3000000"/>
-          </a:xfrm>
-          <a:prstGeom prst="rect">
-            <a:avLst/>
-          </a:prstGeom>
-          <a:noFill/>
-          <a:ln>
-            <a:noFill/>
-          </a:ln>
-        </p:spPr>
-        <p:txBody>
-          <a:bodyPr spcFirstLastPara="1" wrap="square" lIns="91425" tIns="45700" rIns="91425" bIns="45700" anchor="t" anchorCtr="0">
-            <a:noAutofit/>
-          </a:bodyPr>
-          <a:lstStyle/>
-          <a:p>
-            <a:pPr marL="0" marR="0" lvl="0" indent="0" algn="l" rtl="0">
-              <a:spcBef>
-                <a:spcPts val="0"/>
-              </a:spcBef>
-              <a:spcAft>
-                <a:spcPts val="0"/>
-              </a:spcAft>
-              <a:buNone/>
-            </a:pPr>
-            <a:endParaRPr sz="1200">
-              <a:solidFill>
-                <a:schemeClr val="dk1"/>
-              </a:solidFill>
-              <a:latin typeface="Calibri"/>
-              <a:ea typeface="Calibri"/>
-              <a:cs typeface="Calibri"/>
-              <a:sym typeface="Calibri"/>
-            </a:endParaRPr>
-          </a:p>
-        </p:txBody>
-      </p:sp>
-      <p:sp>
-        <p:nvSpPr>
-          <p:cNvPr id="62" name="Google Shape;62;g3ca31053399_0_56:notes">
-            <a:extLst>
-              <a:ext uri="{FF2B5EF4-FFF2-40B4-BE49-F238E27FC236}">
-                <a16:creationId xmlns:a16="http://schemas.microsoft.com/office/drawing/2014/main" id="{1B5F5BAA-A375-91FD-71C4-338751FCA72D}"/>
+          <p:cNvPr id="49" name="Google Shape;49;g3ca31053399_0_44:notes">
+            <a:extLst>
+              <a:ext uri="{FF2B5EF4-FFF2-40B4-BE49-F238E27FC236}">
+                <a16:creationId xmlns:a16="http://schemas.microsoft.com/office/drawing/2014/main" id="{1C9B7F8D-EFBD-7562-B48B-D3D484E90AA9}"/>
               </a:ext>
             </a:extLst>
           </p:cNvPr>
@@ -2140,429 +2042,7 @@
     </p:spTree>
     <p:extLst>
       <p:ext uri="{BB962C8B-B14F-4D97-AF65-F5344CB8AC3E}">
-        <p14:creationId xmlns:p14="http://schemas.microsoft.com/office/powerpoint/2010/main" val="2455909827"/>
-      </p:ext>
-    </p:extLst>
-  </p:cSld>
-  <p:clrMapOvr>
-    <a:masterClrMapping/>
-  </p:clrMapOvr>
-</p:notes>
-</file>
-
-<file path=ppt/notesSlides/notesSlide8.xml><?xml version="1.0" encoding="utf-8"?>
-<p:notes xmlns:a="http://schemas.openxmlformats.org/drawingml/2006/main" xmlns:r="http://schemas.openxmlformats.org/officeDocument/2006/relationships" xmlns:p="http://schemas.openxmlformats.org/presentationml/2006/main" showMasterSp="0" showMasterPhAnim="0">
-  <p:cSld>
-    <p:spTree>
-      <p:nvGrpSpPr>
-        <p:cNvPr id="1" name="Shape 59">
-          <a:extLst>
-            <a:ext uri="{FF2B5EF4-FFF2-40B4-BE49-F238E27FC236}">
-              <a16:creationId xmlns:a16="http://schemas.microsoft.com/office/drawing/2014/main" id="{A56A8589-A313-D1CE-B55E-42429D1BFAEF}"/>
-            </a:ext>
-          </a:extLst>
-        </p:cNvPr>
-        <p:cNvGrpSpPr/>
-        <p:nvPr/>
-      </p:nvGrpSpPr>
-      <p:grpSpPr>
-        <a:xfrm>
-          <a:off x="0" y="0"/>
-          <a:ext cx="0" cy="0"/>
-          <a:chOff x="0" y="0"/>
-          <a:chExt cx="0" cy="0"/>
-        </a:xfrm>
-      </p:grpSpPr>
-      <p:sp>
-        <p:nvSpPr>
-          <p:cNvPr id="60" name="Google Shape;60;g3ca31053399_0_56:notes">
-            <a:extLst>
-              <a:ext uri="{FF2B5EF4-FFF2-40B4-BE49-F238E27FC236}">
-                <a16:creationId xmlns:a16="http://schemas.microsoft.com/office/drawing/2014/main" id="{C01C3203-C590-E1A2-594E-F8B1353AD5A8}"/>
-              </a:ext>
-            </a:extLst>
-          </p:cNvPr>
-          <p:cNvSpPr>
-            <a:spLocks noGrp="1" noRot="1" noChangeAspect="1"/>
-          </p:cNvSpPr>
-          <p:nvPr>
-            <p:ph type="sldImg" idx="2"/>
-          </p:nvPr>
-        </p:nvSpPr>
-        <p:spPr>
-          <a:xfrm>
-            <a:off x="-622300" y="0"/>
-            <a:ext cx="4244975" cy="3000375"/>
-          </a:xfrm>
-          <a:custGeom>
-            <a:avLst/>
-            <a:gdLst/>
-            <a:ahLst/>
-            <a:cxnLst/>
-            <a:rect l="l" t="t" r="r" b="b"/>
-            <a:pathLst>
-              <a:path w="120000" h="120000" extrusionOk="0">
-                <a:moveTo>
-                  <a:pt x="0" y="0"/>
-                </a:moveTo>
-                <a:lnTo>
-                  <a:pt x="120000" y="0"/>
-                </a:lnTo>
-                <a:lnTo>
-                  <a:pt x="120000" y="120000"/>
-                </a:lnTo>
-                <a:lnTo>
-                  <a:pt x="0" y="120000"/>
-                </a:lnTo>
-                <a:close/>
-              </a:path>
-            </a:pathLst>
-          </a:custGeom>
-          <a:noFill/>
-          <a:ln>
-            <a:noFill/>
-          </a:ln>
-        </p:spPr>
-      </p:sp>
-      <p:sp>
-        <p:nvSpPr>
-          <p:cNvPr id="61" name="Google Shape;61;g3ca31053399_0_56:notes">
-            <a:extLst>
-              <a:ext uri="{FF2B5EF4-FFF2-40B4-BE49-F238E27FC236}">
-                <a16:creationId xmlns:a16="http://schemas.microsoft.com/office/drawing/2014/main" id="{68B8FD2F-4A63-40E0-D3C0-95EF97117895}"/>
-              </a:ext>
-            </a:extLst>
-          </p:cNvPr>
-          <p:cNvSpPr txBox="1">
-            <a:spLocks noGrp="1"/>
-          </p:cNvSpPr>
-          <p:nvPr>
-            <p:ph type="body" idx="1"/>
-          </p:nvPr>
-        </p:nvSpPr>
-        <p:spPr>
-          <a:xfrm>
-            <a:off x="0" y="0"/>
-            <a:ext cx="3000000" cy="3000000"/>
-          </a:xfrm>
-          <a:prstGeom prst="rect">
-            <a:avLst/>
-          </a:prstGeom>
-          <a:noFill/>
-          <a:ln>
-            <a:noFill/>
-          </a:ln>
-        </p:spPr>
-        <p:txBody>
-          <a:bodyPr spcFirstLastPara="1" wrap="square" lIns="91425" tIns="45700" rIns="91425" bIns="45700" anchor="t" anchorCtr="0">
-            <a:noAutofit/>
-          </a:bodyPr>
-          <a:lstStyle/>
-          <a:p>
-            <a:pPr marL="0" marR="0" lvl="0" indent="0" algn="l" rtl="0">
-              <a:spcBef>
-                <a:spcPts val="0"/>
-              </a:spcBef>
-              <a:spcAft>
-                <a:spcPts val="0"/>
-              </a:spcAft>
-              <a:buNone/>
-            </a:pPr>
-            <a:endParaRPr sz="1200">
-              <a:solidFill>
-                <a:schemeClr val="dk1"/>
-              </a:solidFill>
-              <a:latin typeface="Calibri"/>
-              <a:ea typeface="Calibri"/>
-              <a:cs typeface="Calibri"/>
-              <a:sym typeface="Calibri"/>
-            </a:endParaRPr>
-          </a:p>
-        </p:txBody>
-      </p:sp>
-      <p:sp>
-        <p:nvSpPr>
-          <p:cNvPr id="62" name="Google Shape;62;g3ca31053399_0_56:notes">
-            <a:extLst>
-              <a:ext uri="{FF2B5EF4-FFF2-40B4-BE49-F238E27FC236}">
-                <a16:creationId xmlns:a16="http://schemas.microsoft.com/office/drawing/2014/main" id="{BBD82AFF-F3F3-2EDD-5982-06C8C4D3374C}"/>
-              </a:ext>
-            </a:extLst>
-          </p:cNvPr>
-          <p:cNvSpPr txBox="1">
-            <a:spLocks noGrp="1"/>
-          </p:cNvSpPr>
-          <p:nvPr>
-            <p:ph type="sldNum" idx="12"/>
-          </p:nvPr>
-        </p:nvSpPr>
-        <p:spPr>
-          <a:xfrm>
-            <a:off x="0" y="0"/>
-            <a:ext cx="3000000" cy="3000000"/>
-          </a:xfrm>
-          <a:prstGeom prst="rect">
-            <a:avLst/>
-          </a:prstGeom>
-          <a:noFill/>
-          <a:ln>
-            <a:noFill/>
-          </a:ln>
-        </p:spPr>
-        <p:txBody>
-          <a:bodyPr spcFirstLastPara="1" wrap="square" lIns="91425" tIns="45700" rIns="91425" bIns="45700" anchor="t" anchorCtr="0">
-            <a:noAutofit/>
-          </a:bodyPr>
-          <a:lstStyle/>
-          <a:p>
-            <a:pPr marL="0" marR="0" lvl="0" indent="0" algn="l" rtl="0">
-              <a:spcBef>
-                <a:spcPts val="0"/>
-              </a:spcBef>
-              <a:spcAft>
-                <a:spcPts val="0"/>
-              </a:spcAft>
-              <a:buNone/>
-            </a:pPr>
-            <a:fld id="{00000000-1234-1234-1234-123412341234}" type="slidenum">
-              <a:rPr lang="en-US" sz="1800" b="0" i="0" u="none" strike="noStrike" cap="none">
-                <a:solidFill>
-                  <a:schemeClr val="dk1"/>
-                </a:solidFill>
-                <a:latin typeface="Calibri"/>
-                <a:ea typeface="Calibri"/>
-                <a:cs typeface="Calibri"/>
-                <a:sym typeface="Calibri"/>
-              </a:rPr>
-              <a:t>8</a:t>
-            </a:fld>
-            <a:endParaRPr sz="1800">
-              <a:solidFill>
-                <a:schemeClr val="dk1"/>
-              </a:solidFill>
-              <a:latin typeface="Calibri"/>
-              <a:ea typeface="Calibri"/>
-              <a:cs typeface="Calibri"/>
-              <a:sym typeface="Calibri"/>
-            </a:endParaRPr>
-          </a:p>
-        </p:txBody>
-      </p:sp>
-    </p:spTree>
-    <p:extLst>
-      <p:ext uri="{BB962C8B-B14F-4D97-AF65-F5344CB8AC3E}">
-        <p14:creationId xmlns:p14="http://schemas.microsoft.com/office/powerpoint/2010/main" val="2030972843"/>
-      </p:ext>
-    </p:extLst>
-  </p:cSld>
-  <p:clrMapOvr>
-    <a:masterClrMapping/>
-  </p:clrMapOvr>
-</p:notes>
-</file>
-
-<file path=ppt/notesSlides/notesSlide9.xml><?xml version="1.0" encoding="utf-8"?>
-<p:notes xmlns:a="http://schemas.openxmlformats.org/drawingml/2006/main" xmlns:r="http://schemas.openxmlformats.org/officeDocument/2006/relationships" xmlns:p="http://schemas.openxmlformats.org/presentationml/2006/main" showMasterSp="0" showMasterPhAnim="0">
-  <p:cSld>
-    <p:spTree>
-      <p:nvGrpSpPr>
-        <p:cNvPr id="1" name="Shape 46">
-          <a:extLst>
-            <a:ext uri="{FF2B5EF4-FFF2-40B4-BE49-F238E27FC236}">
-              <a16:creationId xmlns:a16="http://schemas.microsoft.com/office/drawing/2014/main" id="{819D9229-BEA0-652B-4BA4-673CD3393FAF}"/>
-            </a:ext>
-          </a:extLst>
-        </p:cNvPr>
-        <p:cNvGrpSpPr/>
-        <p:nvPr/>
-      </p:nvGrpSpPr>
-      <p:grpSpPr>
-        <a:xfrm>
-          <a:off x="0" y="0"/>
-          <a:ext cx="0" cy="0"/>
-          <a:chOff x="0" y="0"/>
-          <a:chExt cx="0" cy="0"/>
-        </a:xfrm>
-      </p:grpSpPr>
-      <p:sp>
-        <p:nvSpPr>
-          <p:cNvPr id="47" name="Google Shape;47;g3ca31053399_0_44:notes">
-            <a:extLst>
-              <a:ext uri="{FF2B5EF4-FFF2-40B4-BE49-F238E27FC236}">
-                <a16:creationId xmlns:a16="http://schemas.microsoft.com/office/drawing/2014/main" id="{19794C44-C80A-9A1D-738F-03A6E1D3D58B}"/>
-              </a:ext>
-            </a:extLst>
-          </p:cNvPr>
-          <p:cNvSpPr>
-            <a:spLocks noGrp="1" noRot="1" noChangeAspect="1"/>
-          </p:cNvSpPr>
-          <p:nvPr>
-            <p:ph type="sldImg" idx="2"/>
-          </p:nvPr>
-        </p:nvSpPr>
-        <p:spPr>
-          <a:xfrm>
-            <a:off x="-622300" y="0"/>
-            <a:ext cx="4244975" cy="3000375"/>
-          </a:xfrm>
-          <a:custGeom>
-            <a:avLst/>
-            <a:gdLst/>
-            <a:ahLst/>
-            <a:cxnLst/>
-            <a:rect l="l" t="t" r="r" b="b"/>
-            <a:pathLst>
-              <a:path w="120000" h="120000" extrusionOk="0">
-                <a:moveTo>
-                  <a:pt x="0" y="0"/>
-                </a:moveTo>
-                <a:lnTo>
-                  <a:pt x="120000" y="0"/>
-                </a:lnTo>
-                <a:lnTo>
-                  <a:pt x="120000" y="120000"/>
-                </a:lnTo>
-                <a:lnTo>
-                  <a:pt x="0" y="120000"/>
-                </a:lnTo>
-                <a:close/>
-              </a:path>
-            </a:pathLst>
-          </a:custGeom>
-          <a:noFill/>
-          <a:ln>
-            <a:noFill/>
-          </a:ln>
-        </p:spPr>
-      </p:sp>
-      <p:sp>
-        <p:nvSpPr>
-          <p:cNvPr id="48" name="Google Shape;48;g3ca31053399_0_44:notes">
-            <a:extLst>
-              <a:ext uri="{FF2B5EF4-FFF2-40B4-BE49-F238E27FC236}">
-                <a16:creationId xmlns:a16="http://schemas.microsoft.com/office/drawing/2014/main" id="{B16EB5EA-FEB5-A474-974C-50EEA6D7C30D}"/>
-              </a:ext>
-            </a:extLst>
-          </p:cNvPr>
-          <p:cNvSpPr txBox="1">
-            <a:spLocks noGrp="1"/>
-          </p:cNvSpPr>
-          <p:nvPr>
-            <p:ph type="body" idx="1"/>
-          </p:nvPr>
-        </p:nvSpPr>
-        <p:spPr>
-          <a:xfrm>
-            <a:off x="0" y="0"/>
-            <a:ext cx="3000000" cy="3000000"/>
-          </a:xfrm>
-          <a:prstGeom prst="rect">
-            <a:avLst/>
-          </a:prstGeom>
-          <a:noFill/>
-          <a:ln>
-            <a:noFill/>
-          </a:ln>
-        </p:spPr>
-        <p:txBody>
-          <a:bodyPr spcFirstLastPara="1" wrap="square" lIns="91425" tIns="45700" rIns="91425" bIns="45700" anchor="t" anchorCtr="0">
-            <a:noAutofit/>
-          </a:bodyPr>
-          <a:lstStyle/>
-          <a:p>
-            <a:pPr marL="0" marR="0" lvl="0" indent="0" algn="l" rtl="0">
-              <a:spcBef>
-                <a:spcPts val="0"/>
-              </a:spcBef>
-              <a:spcAft>
-                <a:spcPts val="0"/>
-              </a:spcAft>
-              <a:buNone/>
-            </a:pPr>
-            <a:endParaRPr sz="1200">
-              <a:solidFill>
-                <a:schemeClr val="dk1"/>
-              </a:solidFill>
-              <a:latin typeface="Calibri"/>
-              <a:ea typeface="Calibri"/>
-              <a:cs typeface="Calibri"/>
-              <a:sym typeface="Calibri"/>
-            </a:endParaRPr>
-          </a:p>
-        </p:txBody>
-      </p:sp>
-      <p:sp>
-        <p:nvSpPr>
-          <p:cNvPr id="49" name="Google Shape;49;g3ca31053399_0_44:notes">
-            <a:extLst>
-              <a:ext uri="{FF2B5EF4-FFF2-40B4-BE49-F238E27FC236}">
-                <a16:creationId xmlns:a16="http://schemas.microsoft.com/office/drawing/2014/main" id="{FB159903-DEDD-6131-C58B-2DE94E805C33}"/>
-              </a:ext>
-            </a:extLst>
-          </p:cNvPr>
-          <p:cNvSpPr txBox="1">
-            <a:spLocks noGrp="1"/>
-          </p:cNvSpPr>
-          <p:nvPr>
-            <p:ph type="sldNum" idx="12"/>
-          </p:nvPr>
-        </p:nvSpPr>
-        <p:spPr>
-          <a:xfrm>
-            <a:off x="0" y="0"/>
-            <a:ext cx="3000000" cy="3000000"/>
-          </a:xfrm>
-          <a:prstGeom prst="rect">
-            <a:avLst/>
-          </a:prstGeom>
-          <a:noFill/>
-          <a:ln>
-            <a:noFill/>
-          </a:ln>
-        </p:spPr>
-        <p:txBody>
-          <a:bodyPr spcFirstLastPara="1" wrap="square" lIns="91425" tIns="45700" rIns="91425" bIns="45700" anchor="t" anchorCtr="0">
-            <a:noAutofit/>
-          </a:bodyPr>
-          <a:lstStyle/>
-          <a:p>
-            <a:pPr marL="0" marR="0" lvl="0" indent="0" algn="l" rtl="0">
-              <a:spcBef>
-                <a:spcPts val="0"/>
-              </a:spcBef>
-              <a:spcAft>
-                <a:spcPts val="0"/>
-              </a:spcAft>
-              <a:buNone/>
-            </a:pPr>
-            <a:fld id="{00000000-1234-1234-1234-123412341234}" type="slidenum">
-              <a:rPr lang="en-US" sz="1800" b="0" i="0" u="none" strike="noStrike" cap="none">
-                <a:solidFill>
-                  <a:schemeClr val="dk1"/>
-                </a:solidFill>
-                <a:latin typeface="Calibri"/>
-                <a:ea typeface="Calibri"/>
-                <a:cs typeface="Calibri"/>
-                <a:sym typeface="Calibri"/>
-              </a:rPr>
-              <a:t>9</a:t>
-            </a:fld>
-            <a:endParaRPr sz="1800">
-              <a:solidFill>
-                <a:schemeClr val="dk1"/>
-              </a:solidFill>
-              <a:latin typeface="Calibri"/>
-              <a:ea typeface="Calibri"/>
-              <a:cs typeface="Calibri"/>
-              <a:sym typeface="Calibri"/>
-            </a:endParaRPr>
-          </a:p>
-        </p:txBody>
-      </p:sp>
-    </p:spTree>
-    <p:extLst>
-      <p:ext uri="{BB962C8B-B14F-4D97-AF65-F5344CB8AC3E}">
-        <p14:creationId xmlns:p14="http://schemas.microsoft.com/office/powerpoint/2010/main" val="1757847960"/>
+        <p14:creationId xmlns:p14="http://schemas.microsoft.com/office/powerpoint/2010/main" val="2702910482"/>
       </p:ext>
     </p:extLst>
   </p:cSld>
@@ -4013,1822 +3493,7 @@
 </p:sld>
 </file>
 
-<file path=ppt/slides/slide10.xml><?xml version="1.0" encoding="utf-8"?>
-<p:sld xmlns:a="http://schemas.openxmlformats.org/drawingml/2006/main" xmlns:r="http://schemas.openxmlformats.org/officeDocument/2006/relationships" xmlns:p="http://schemas.openxmlformats.org/presentationml/2006/main">
-  <p:cSld>
-    <p:spTree>
-      <p:nvGrpSpPr>
-        <p:cNvPr id="1" name="Shape 50">
-          <a:extLst>
-            <a:ext uri="{FF2B5EF4-FFF2-40B4-BE49-F238E27FC236}">
-              <a16:creationId xmlns:a16="http://schemas.microsoft.com/office/drawing/2014/main" id="{AFEE5EF2-73B2-8F54-271D-5C83EB9BF53F}"/>
-            </a:ext>
-          </a:extLst>
-        </p:cNvPr>
-        <p:cNvGrpSpPr/>
-        <p:nvPr/>
-      </p:nvGrpSpPr>
-      <p:grpSpPr>
-        <a:xfrm>
-          <a:off x="0" y="0"/>
-          <a:ext cx="0" cy="0"/>
-          <a:chOff x="0" y="0"/>
-          <a:chExt cx="0" cy="0"/>
-        </a:xfrm>
-      </p:grpSpPr>
-      <p:pic>
-        <p:nvPicPr>
-          <p:cNvPr id="2" name="Picture 2">
-            <a:extLst>
-              <a:ext uri="{FF2B5EF4-FFF2-40B4-BE49-F238E27FC236}">
-                <a16:creationId xmlns:a16="http://schemas.microsoft.com/office/drawing/2014/main" id="{6AF47A96-CBAD-ECEB-744F-F690C21619C1}"/>
-              </a:ext>
-            </a:extLst>
-          </p:cNvPr>
-          <p:cNvPicPr>
-            <a:picLocks noChangeAspect="1" noChangeArrowheads="1"/>
-          </p:cNvPicPr>
-          <p:nvPr/>
-        </p:nvPicPr>
-        <p:blipFill>
-          <a:blip r:embed="rId3">
-            <a:extLst>
-              <a:ext uri="{28A0092B-C50C-407E-A947-70E740481C1C}">
-                <a14:useLocalDpi xmlns:a14="http://schemas.microsoft.com/office/drawing/2010/main" val="0"/>
-              </a:ext>
-            </a:extLst>
-          </a:blip>
-          <a:srcRect/>
-          <a:stretch>
-            <a:fillRect/>
-          </a:stretch>
-        </p:blipFill>
-        <p:spPr bwMode="auto">
-          <a:xfrm>
-            <a:off x="18386747" y="0"/>
-            <a:ext cx="2345138" cy="1563425"/>
-          </a:xfrm>
-          <a:prstGeom prst="rect">
-            <a:avLst/>
-          </a:prstGeom>
-          <a:noFill/>
-          <a:extLst>
-            <a:ext uri="{909E8E84-426E-40DD-AFC4-6F175D3DCCD1}">
-              <a14:hiddenFill xmlns:a14="http://schemas.microsoft.com/office/drawing/2010/main">
-                <a:solidFill>
-                  <a:srgbClr val="FFFFFF"/>
-                </a:solidFill>
-              </a14:hiddenFill>
-            </a:ext>
-          </a:extLst>
-        </p:spPr>
-      </p:pic>
-      <p:pic>
-        <p:nvPicPr>
-          <p:cNvPr id="51" name="Google Shape;51;g3ca31053399_0_44" descr=" ">
-            <a:extLst>
-              <a:ext uri="{FF2B5EF4-FFF2-40B4-BE49-F238E27FC236}">
-                <a16:creationId xmlns:a16="http://schemas.microsoft.com/office/drawing/2014/main" id="{2DCB16BF-8B18-A175-6D93-8FC4C7D13854}"/>
-              </a:ext>
-            </a:extLst>
-          </p:cNvPr>
-          <p:cNvPicPr preferRelativeResize="0"/>
-          <p:nvPr/>
-        </p:nvPicPr>
-        <p:blipFill rotWithShape="1">
-          <a:blip r:embed="rId4">
-            <a:alphaModFix/>
-          </a:blip>
-          <a:srcRect/>
-          <a:stretch/>
-        </p:blipFill>
-        <p:spPr>
-          <a:xfrm>
-            <a:off x="12498685" y="9332149"/>
-            <a:ext cx="6324900" cy="5220774"/>
-          </a:xfrm>
-          <a:prstGeom prst="rect">
-            <a:avLst/>
-          </a:prstGeom>
-          <a:noFill/>
-          <a:ln>
-            <a:noFill/>
-          </a:ln>
-        </p:spPr>
-      </p:pic>
-      <p:pic>
-        <p:nvPicPr>
-          <p:cNvPr id="52" name="Google Shape;52;g3ca31053399_0_44" descr=" ">
-            <a:extLst>
-              <a:ext uri="{FF2B5EF4-FFF2-40B4-BE49-F238E27FC236}">
-                <a16:creationId xmlns:a16="http://schemas.microsoft.com/office/drawing/2014/main" id="{4712A96C-431D-BDDF-0C31-A10963D979A5}"/>
-              </a:ext>
-            </a:extLst>
-          </p:cNvPr>
-          <p:cNvPicPr preferRelativeResize="0"/>
-          <p:nvPr/>
-        </p:nvPicPr>
-        <p:blipFill rotWithShape="1">
-          <a:blip r:embed="rId5">
-            <a:alphaModFix/>
-          </a:blip>
-          <a:srcRect/>
-          <a:stretch/>
-        </p:blipFill>
-        <p:spPr>
-          <a:xfrm>
-            <a:off x="14796618" y="1042904"/>
-            <a:ext cx="6591197" cy="7727137"/>
-          </a:xfrm>
-          <a:prstGeom prst="rect">
-            <a:avLst/>
-          </a:prstGeom>
-          <a:noFill/>
-          <a:ln>
-            <a:noFill/>
-          </a:ln>
-        </p:spPr>
-      </p:pic>
-      <p:sp>
-        <p:nvSpPr>
-          <p:cNvPr id="53" name="Google Shape;53;g3ca31053399_0_44">
-            <a:extLst>
-              <a:ext uri="{FF2B5EF4-FFF2-40B4-BE49-F238E27FC236}">
-                <a16:creationId xmlns:a16="http://schemas.microsoft.com/office/drawing/2014/main" id="{0C7F5EA4-B751-AAA0-B661-7908DD695F02}"/>
-              </a:ext>
-            </a:extLst>
-          </p:cNvPr>
-          <p:cNvSpPr/>
-          <p:nvPr/>
-        </p:nvSpPr>
-        <p:spPr>
-          <a:xfrm>
-            <a:off x="0" y="1193961"/>
-            <a:ext cx="21387900" cy="25500"/>
-          </a:xfrm>
-          <a:prstGeom prst="rect">
-            <a:avLst/>
-          </a:prstGeom>
-          <a:solidFill>
-            <a:srgbClr val="ED3237"/>
-          </a:solidFill>
-          <a:ln>
-            <a:noFill/>
-          </a:ln>
-        </p:spPr>
-        <p:txBody>
-          <a:bodyPr spcFirstLastPara="1" wrap="square" lIns="91425" tIns="91425" rIns="91425" bIns="91425" anchor="ctr" anchorCtr="0">
-            <a:noAutofit/>
-          </a:bodyPr>
-          <a:lstStyle/>
-          <a:p>
-            <a:pPr marL="0" lvl="0" indent="0" algn="l" rtl="0">
-              <a:spcBef>
-                <a:spcPts val="0"/>
-              </a:spcBef>
-              <a:spcAft>
-                <a:spcPts val="0"/>
-              </a:spcAft>
-              <a:buNone/>
-            </a:pPr>
-            <a:endParaRPr/>
-          </a:p>
-        </p:txBody>
-      </p:sp>
-      <p:sp>
-        <p:nvSpPr>
-          <p:cNvPr id="54" name="Google Shape;54;g3ca31053399_0_44">
-            <a:extLst>
-              <a:ext uri="{FF2B5EF4-FFF2-40B4-BE49-F238E27FC236}">
-                <a16:creationId xmlns:a16="http://schemas.microsoft.com/office/drawing/2014/main" id="{FDA1D188-94D9-88CC-91BB-CEA18773408A}"/>
-              </a:ext>
-            </a:extLst>
-          </p:cNvPr>
-          <p:cNvSpPr/>
-          <p:nvPr/>
-        </p:nvSpPr>
-        <p:spPr>
-          <a:xfrm>
-            <a:off x="0" y="15115032"/>
-            <a:ext cx="21387900" cy="152400"/>
-          </a:xfrm>
-          <a:prstGeom prst="rect">
-            <a:avLst/>
-          </a:prstGeom>
-          <a:solidFill>
-            <a:srgbClr val="413E3C"/>
-          </a:solidFill>
-          <a:ln>
-            <a:noFill/>
-          </a:ln>
-        </p:spPr>
-        <p:txBody>
-          <a:bodyPr spcFirstLastPara="1" wrap="square" lIns="91425" tIns="91425" rIns="91425" bIns="91425" anchor="ctr" anchorCtr="0">
-            <a:noAutofit/>
-          </a:bodyPr>
-          <a:lstStyle/>
-          <a:p>
-            <a:pPr marL="0" lvl="0" indent="0" algn="l" rtl="0">
-              <a:spcBef>
-                <a:spcPts val="0"/>
-              </a:spcBef>
-              <a:spcAft>
-                <a:spcPts val="0"/>
-              </a:spcAft>
-              <a:buNone/>
-            </a:pPr>
-            <a:endParaRPr/>
-          </a:p>
-        </p:txBody>
-      </p:sp>
-      <p:pic>
-        <p:nvPicPr>
-          <p:cNvPr id="55" name="Google Shape;55;g3ca31053399_0_44" descr=" ">
-            <a:extLst>
-              <a:ext uri="{FF2B5EF4-FFF2-40B4-BE49-F238E27FC236}">
-                <a16:creationId xmlns:a16="http://schemas.microsoft.com/office/drawing/2014/main" id="{0D11295A-6761-8D41-1963-CC2742C6FA92}"/>
-              </a:ext>
-            </a:extLst>
-          </p:cNvPr>
-          <p:cNvPicPr preferRelativeResize="0"/>
-          <p:nvPr/>
-        </p:nvPicPr>
-        <p:blipFill rotWithShape="1">
-          <a:blip r:embed="rId6">
-            <a:alphaModFix/>
-          </a:blip>
-          <a:srcRect/>
-          <a:stretch/>
-        </p:blipFill>
-        <p:spPr>
-          <a:xfrm>
-            <a:off x="17441655" y="192932"/>
-            <a:ext cx="1321886" cy="788994"/>
-          </a:xfrm>
-          <a:prstGeom prst="rect">
-            <a:avLst/>
-          </a:prstGeom>
-          <a:noFill/>
-          <a:ln>
-            <a:noFill/>
-          </a:ln>
-        </p:spPr>
-      </p:pic>
-      <p:pic>
-        <p:nvPicPr>
-          <p:cNvPr id="56" name="Google Shape;56;g3ca31053399_0_44" descr=" ">
-            <a:extLst>
-              <a:ext uri="{FF2B5EF4-FFF2-40B4-BE49-F238E27FC236}">
-                <a16:creationId xmlns:a16="http://schemas.microsoft.com/office/drawing/2014/main" id="{373FFCC9-E399-3A86-080A-2C1C39882BD4}"/>
-              </a:ext>
-            </a:extLst>
-          </p:cNvPr>
-          <p:cNvPicPr preferRelativeResize="0"/>
-          <p:nvPr/>
-        </p:nvPicPr>
-        <p:blipFill rotWithShape="1">
-          <a:blip r:embed="rId7">
-            <a:alphaModFix/>
-          </a:blip>
-          <a:srcRect/>
-          <a:stretch/>
-        </p:blipFill>
-        <p:spPr>
-          <a:xfrm>
-            <a:off x="774737" y="9629829"/>
-            <a:ext cx="5042140" cy="5156893"/>
-          </a:xfrm>
-          <a:prstGeom prst="rect">
-            <a:avLst/>
-          </a:prstGeom>
-          <a:noFill/>
-          <a:ln>
-            <a:noFill/>
-          </a:ln>
-        </p:spPr>
-      </p:pic>
-      <p:sp>
-        <p:nvSpPr>
-          <p:cNvPr id="57" name="Google Shape;57;g3ca31053399_0_44">
-            <a:extLst>
-              <a:ext uri="{FF2B5EF4-FFF2-40B4-BE49-F238E27FC236}">
-                <a16:creationId xmlns:a16="http://schemas.microsoft.com/office/drawing/2014/main" id="{357B6308-8515-72F6-7A86-5DF3A0142109}"/>
-              </a:ext>
-            </a:extLst>
-          </p:cNvPr>
-          <p:cNvSpPr txBox="1"/>
-          <p:nvPr/>
-        </p:nvSpPr>
-        <p:spPr>
-          <a:xfrm>
-            <a:off x="1387225" y="186350"/>
-            <a:ext cx="6901500" cy="789000"/>
-          </a:xfrm>
-          <a:prstGeom prst="rect">
-            <a:avLst/>
-          </a:prstGeom>
-          <a:noFill/>
-          <a:ln>
-            <a:noFill/>
-          </a:ln>
-        </p:spPr>
-        <p:txBody>
-          <a:bodyPr spcFirstLastPara="1" wrap="square" lIns="91425" tIns="91425" rIns="91425" bIns="91425" anchor="t" anchorCtr="0">
-            <a:noAutofit/>
-          </a:bodyPr>
-          <a:lstStyle/>
-          <a:p>
-            <a:pPr lvl="0"/>
-            <a:r>
-              <a:rPr lang="en-US" sz="3000" dirty="0">
-                <a:latin typeface="Times New Roman" panose="02020603050405020304" pitchFamily="18" charset="0"/>
-                <a:cs typeface="Times New Roman" panose="02020603050405020304" pitchFamily="18" charset="0"/>
-              </a:rPr>
-              <a:t>Appendix</a:t>
-            </a:r>
-          </a:p>
-        </p:txBody>
-      </p:sp>
-      <p:sp>
-        <p:nvSpPr>
-          <p:cNvPr id="58" name="Google Shape;58;g3ca31053399_0_44">
-            <a:extLst>
-              <a:ext uri="{FF2B5EF4-FFF2-40B4-BE49-F238E27FC236}">
-                <a16:creationId xmlns:a16="http://schemas.microsoft.com/office/drawing/2014/main" id="{E6BB464D-F7C9-7A12-5515-54DA14B3B8F5}"/>
-              </a:ext>
-            </a:extLst>
-          </p:cNvPr>
-          <p:cNvSpPr txBox="1"/>
-          <p:nvPr/>
-        </p:nvSpPr>
-        <p:spPr>
-          <a:xfrm>
-            <a:off x="1549350" y="2967364"/>
-            <a:ext cx="18289200" cy="10801200"/>
-          </a:xfrm>
-          <a:prstGeom prst="rect">
-            <a:avLst/>
-          </a:prstGeom>
-          <a:noFill/>
-          <a:ln>
-            <a:noFill/>
-          </a:ln>
-        </p:spPr>
-        <p:txBody>
-          <a:bodyPr spcFirstLastPara="1" wrap="square" lIns="91425" tIns="91425" rIns="91425" bIns="91425" anchor="t" anchorCtr="0">
-            <a:noAutofit/>
-          </a:bodyPr>
-          <a:lstStyle/>
-          <a:p>
-            <a:pPr marL="0" lvl="0" indent="0" algn="l" rtl="0">
-              <a:spcBef>
-                <a:spcPts val="0"/>
-              </a:spcBef>
-              <a:spcAft>
-                <a:spcPts val="0"/>
-              </a:spcAft>
-              <a:buNone/>
-            </a:pPr>
-            <a:endParaRPr/>
-          </a:p>
-        </p:txBody>
-      </p:sp>
-      <p:pic>
-        <p:nvPicPr>
-          <p:cNvPr id="4" name="Picture 3">
-            <a:extLst>
-              <a:ext uri="{FF2B5EF4-FFF2-40B4-BE49-F238E27FC236}">
-                <a16:creationId xmlns:a16="http://schemas.microsoft.com/office/drawing/2014/main" id="{ACCA89CC-2DA8-ABC6-A619-D5F4BC7CAC51}"/>
-              </a:ext>
-            </a:extLst>
-          </p:cNvPr>
-          <p:cNvPicPr>
-            <a:picLocks noChangeAspect="1"/>
-          </p:cNvPicPr>
-          <p:nvPr/>
-        </p:nvPicPr>
-        <p:blipFill>
-          <a:blip r:embed="rId8"/>
-          <a:stretch>
-            <a:fillRect/>
-          </a:stretch>
-        </p:blipFill>
-        <p:spPr>
-          <a:xfrm>
-            <a:off x="3164318" y="2565929"/>
-            <a:ext cx="14927898" cy="10391173"/>
-          </a:xfrm>
-          <a:prstGeom prst="rect">
-            <a:avLst/>
-          </a:prstGeom>
-        </p:spPr>
-      </p:pic>
-    </p:spTree>
-    <p:extLst>
-      <p:ext uri="{BB962C8B-B14F-4D97-AF65-F5344CB8AC3E}">
-        <p14:creationId xmlns:p14="http://schemas.microsoft.com/office/powerpoint/2010/main" val="4214831028"/>
-      </p:ext>
-    </p:extLst>
-  </p:cSld>
-  <p:clrMapOvr>
-    <a:masterClrMapping/>
-  </p:clrMapOvr>
-</p:sld>
-</file>
-
 <file path=ppt/slides/slide2.xml><?xml version="1.0" encoding="utf-8"?>
-<p:sld xmlns:a="http://schemas.openxmlformats.org/drawingml/2006/main" xmlns:r="http://schemas.openxmlformats.org/officeDocument/2006/relationships" xmlns:p="http://schemas.openxmlformats.org/presentationml/2006/main">
-  <p:cSld>
-    <p:bg>
-      <p:bgPr>
-        <a:solidFill>
-          <a:srgbClr val="FFFFFF"/>
-        </a:solidFill>
-        <a:effectLst/>
-      </p:bgPr>
-    </p:bg>
-    <p:spTree>
-      <p:nvGrpSpPr>
-        <p:cNvPr id="1" name="Shape 76"/>
-        <p:cNvGrpSpPr/>
-        <p:nvPr/>
-      </p:nvGrpSpPr>
-      <p:grpSpPr>
-        <a:xfrm>
-          <a:off x="0" y="0"/>
-          <a:ext cx="0" cy="0"/>
-          <a:chOff x="0" y="0"/>
-          <a:chExt cx="0" cy="0"/>
-        </a:xfrm>
-      </p:grpSpPr>
-      <p:pic>
-        <p:nvPicPr>
-          <p:cNvPr id="2" name="Picture 2">
-            <a:extLst>
-              <a:ext uri="{FF2B5EF4-FFF2-40B4-BE49-F238E27FC236}">
-                <a16:creationId xmlns:a16="http://schemas.microsoft.com/office/drawing/2014/main" id="{ED6AE38A-FBB0-DABF-52CE-48A8682FEB46}"/>
-              </a:ext>
-            </a:extLst>
-          </p:cNvPr>
-          <p:cNvPicPr>
-            <a:picLocks noChangeAspect="1" noChangeArrowheads="1"/>
-          </p:cNvPicPr>
-          <p:nvPr/>
-        </p:nvPicPr>
-        <p:blipFill>
-          <a:blip r:embed="rId3">
-            <a:extLst>
-              <a:ext uri="{28A0092B-C50C-407E-A947-70E740481C1C}">
-                <a14:useLocalDpi xmlns:a14="http://schemas.microsoft.com/office/drawing/2010/main" val="0"/>
-              </a:ext>
-            </a:extLst>
-          </a:blip>
-          <a:srcRect/>
-          <a:stretch>
-            <a:fillRect/>
-          </a:stretch>
-        </p:blipFill>
-        <p:spPr bwMode="auto">
-          <a:xfrm>
-            <a:off x="18386747" y="0"/>
-            <a:ext cx="2345138" cy="1563425"/>
-          </a:xfrm>
-          <a:prstGeom prst="rect">
-            <a:avLst/>
-          </a:prstGeom>
-          <a:noFill/>
-          <a:extLst>
-            <a:ext uri="{909E8E84-426E-40DD-AFC4-6F175D3DCCD1}">
-              <a14:hiddenFill xmlns:a14="http://schemas.microsoft.com/office/drawing/2010/main">
-                <a:solidFill>
-                  <a:srgbClr val="FFFFFF"/>
-                </a:solidFill>
-              </a14:hiddenFill>
-            </a:ext>
-          </a:extLst>
-        </p:spPr>
-      </p:pic>
-      <p:pic>
-        <p:nvPicPr>
-          <p:cNvPr id="77" name="Google Shape;77;g3ca31053399_0_68" descr=" "/>
-          <p:cNvPicPr preferRelativeResize="0"/>
-          <p:nvPr/>
-        </p:nvPicPr>
-        <p:blipFill rotWithShape="1">
-          <a:blip r:embed="rId4">
-            <a:alphaModFix/>
-          </a:blip>
-          <a:srcRect/>
-          <a:stretch/>
-        </p:blipFill>
-        <p:spPr>
-          <a:xfrm>
-            <a:off x="12498685" y="9332149"/>
-            <a:ext cx="6324900" cy="5220774"/>
-          </a:xfrm>
-          <a:prstGeom prst="rect">
-            <a:avLst/>
-          </a:prstGeom>
-          <a:noFill/>
-          <a:ln>
-            <a:noFill/>
-          </a:ln>
-        </p:spPr>
-      </p:pic>
-      <p:pic>
-        <p:nvPicPr>
-          <p:cNvPr id="78" name="Google Shape;78;g3ca31053399_0_68" descr=" "/>
-          <p:cNvPicPr preferRelativeResize="0"/>
-          <p:nvPr/>
-        </p:nvPicPr>
-        <p:blipFill rotWithShape="1">
-          <a:blip r:embed="rId5">
-            <a:alphaModFix/>
-          </a:blip>
-          <a:srcRect/>
-          <a:stretch/>
-        </p:blipFill>
-        <p:spPr>
-          <a:xfrm>
-            <a:off x="14796618" y="1042904"/>
-            <a:ext cx="6591197" cy="7727137"/>
-          </a:xfrm>
-          <a:prstGeom prst="rect">
-            <a:avLst/>
-          </a:prstGeom>
-          <a:noFill/>
-          <a:ln>
-            <a:noFill/>
-          </a:ln>
-        </p:spPr>
-      </p:pic>
-      <p:sp>
-        <p:nvSpPr>
-          <p:cNvPr id="79" name="Google Shape;79;g3ca31053399_0_68"/>
-          <p:cNvSpPr/>
-          <p:nvPr/>
-        </p:nvSpPr>
-        <p:spPr>
-          <a:xfrm>
-            <a:off x="0" y="1193961"/>
-            <a:ext cx="21387900" cy="25500"/>
-          </a:xfrm>
-          <a:prstGeom prst="rect">
-            <a:avLst/>
-          </a:prstGeom>
-          <a:solidFill>
-            <a:srgbClr val="ED3237"/>
-          </a:solidFill>
-          <a:ln>
-            <a:noFill/>
-          </a:ln>
-        </p:spPr>
-        <p:txBody>
-          <a:bodyPr spcFirstLastPara="1" wrap="square" lIns="91425" tIns="91425" rIns="91425" bIns="91425" anchor="ctr" anchorCtr="0">
-            <a:noAutofit/>
-          </a:bodyPr>
-          <a:lstStyle/>
-          <a:p>
-            <a:pPr marL="0" lvl="0" indent="0" algn="l" rtl="0">
-              <a:spcBef>
-                <a:spcPts val="0"/>
-              </a:spcBef>
-              <a:spcAft>
-                <a:spcPts val="0"/>
-              </a:spcAft>
-              <a:buNone/>
-            </a:pPr>
-            <a:endParaRPr/>
-          </a:p>
-        </p:txBody>
-      </p:sp>
-      <p:sp>
-        <p:nvSpPr>
-          <p:cNvPr id="80" name="Google Shape;80;g3ca31053399_0_68"/>
-          <p:cNvSpPr/>
-          <p:nvPr/>
-        </p:nvSpPr>
-        <p:spPr>
-          <a:xfrm>
-            <a:off x="0" y="15115032"/>
-            <a:ext cx="21387900" cy="152400"/>
-          </a:xfrm>
-          <a:prstGeom prst="rect">
-            <a:avLst/>
-          </a:prstGeom>
-          <a:solidFill>
-            <a:srgbClr val="413E3C"/>
-          </a:solidFill>
-          <a:ln>
-            <a:noFill/>
-          </a:ln>
-        </p:spPr>
-        <p:txBody>
-          <a:bodyPr spcFirstLastPara="1" wrap="square" lIns="91425" tIns="91425" rIns="91425" bIns="91425" anchor="ctr" anchorCtr="0">
-            <a:noAutofit/>
-          </a:bodyPr>
-          <a:lstStyle/>
-          <a:p>
-            <a:pPr marL="0" lvl="0" indent="0" algn="l" rtl="0">
-              <a:spcBef>
-                <a:spcPts val="0"/>
-              </a:spcBef>
-              <a:spcAft>
-                <a:spcPts val="0"/>
-              </a:spcAft>
-              <a:buNone/>
-            </a:pPr>
-            <a:endParaRPr/>
-          </a:p>
-        </p:txBody>
-      </p:sp>
-      <p:pic>
-        <p:nvPicPr>
-          <p:cNvPr id="81" name="Google Shape;81;g3ca31053399_0_68" descr=" "/>
-          <p:cNvPicPr preferRelativeResize="0"/>
-          <p:nvPr/>
-        </p:nvPicPr>
-        <p:blipFill rotWithShape="1">
-          <a:blip r:embed="rId6">
-            <a:alphaModFix/>
-          </a:blip>
-          <a:srcRect/>
-          <a:stretch/>
-        </p:blipFill>
-        <p:spPr>
-          <a:xfrm>
-            <a:off x="17441655" y="192932"/>
-            <a:ext cx="1321886" cy="788994"/>
-          </a:xfrm>
-          <a:prstGeom prst="rect">
-            <a:avLst/>
-          </a:prstGeom>
-          <a:noFill/>
-          <a:ln>
-            <a:noFill/>
-          </a:ln>
-        </p:spPr>
-      </p:pic>
-      <p:pic>
-        <p:nvPicPr>
-          <p:cNvPr id="82" name="Google Shape;82;g3ca31053399_0_68" descr=" "/>
-          <p:cNvPicPr preferRelativeResize="0"/>
-          <p:nvPr/>
-        </p:nvPicPr>
-        <p:blipFill rotWithShape="1">
-          <a:blip r:embed="rId7">
-            <a:alphaModFix/>
-          </a:blip>
-          <a:srcRect/>
-          <a:stretch/>
-        </p:blipFill>
-        <p:spPr>
-          <a:xfrm>
-            <a:off x="774737" y="9629829"/>
-            <a:ext cx="5042140" cy="5156893"/>
-          </a:xfrm>
-          <a:prstGeom prst="rect">
-            <a:avLst/>
-          </a:prstGeom>
-          <a:noFill/>
-          <a:ln>
-            <a:noFill/>
-          </a:ln>
-        </p:spPr>
-      </p:pic>
-      <p:sp>
-        <p:nvSpPr>
-          <p:cNvPr id="83" name="Google Shape;83;g3ca31053399_0_68"/>
-          <p:cNvSpPr txBox="1"/>
-          <p:nvPr/>
-        </p:nvSpPr>
-        <p:spPr>
-          <a:xfrm>
-            <a:off x="1387225" y="186350"/>
-            <a:ext cx="6901500" cy="789000"/>
-          </a:xfrm>
-          <a:prstGeom prst="rect">
-            <a:avLst/>
-          </a:prstGeom>
-          <a:noFill/>
-          <a:ln>
-            <a:noFill/>
-          </a:ln>
-        </p:spPr>
-        <p:txBody>
-          <a:bodyPr spcFirstLastPara="1" wrap="square" lIns="91425" tIns="91425" rIns="91425" bIns="91425" anchor="t" anchorCtr="0">
-            <a:noAutofit/>
-          </a:bodyPr>
-          <a:lstStyle/>
-          <a:p>
-            <a:pPr marL="0" lvl="0" indent="0" algn="l" rtl="0">
-              <a:spcBef>
-                <a:spcPts val="0"/>
-              </a:spcBef>
-              <a:spcAft>
-                <a:spcPts val="0"/>
-              </a:spcAft>
-              <a:buNone/>
-            </a:pPr>
-            <a:r>
-              <a:rPr lang="en-US" sz="3000" dirty="0">
-                <a:latin typeface="Times New Roman" panose="02020603050405020304" pitchFamily="18" charset="0"/>
-                <a:cs typeface="Times New Roman" panose="02020603050405020304" pitchFamily="18" charset="0"/>
-              </a:rPr>
-              <a:t>Introduction</a:t>
-            </a:r>
-            <a:endParaRPr sz="3000" dirty="0">
-              <a:latin typeface="Times New Roman" panose="02020603050405020304" pitchFamily="18" charset="0"/>
-              <a:cs typeface="Times New Roman" panose="02020603050405020304" pitchFamily="18" charset="0"/>
-            </a:endParaRPr>
-          </a:p>
-        </p:txBody>
-      </p:sp>
-      <p:sp>
-        <p:nvSpPr>
-          <p:cNvPr id="84" name="Google Shape;84;g3ca31053399_0_68"/>
-          <p:cNvSpPr txBox="1"/>
-          <p:nvPr/>
-        </p:nvSpPr>
-        <p:spPr>
-          <a:xfrm>
-            <a:off x="1387225" y="2912500"/>
-            <a:ext cx="18289200" cy="10801200"/>
-          </a:xfrm>
-          <a:prstGeom prst="rect">
-            <a:avLst/>
-          </a:prstGeom>
-          <a:noFill/>
-          <a:ln>
-            <a:noFill/>
-          </a:ln>
-        </p:spPr>
-        <p:txBody>
-          <a:bodyPr spcFirstLastPara="1" wrap="square" lIns="91425" tIns="91425" rIns="91425" bIns="91425" anchor="t" anchorCtr="0">
-            <a:noAutofit/>
-          </a:bodyPr>
-          <a:lstStyle/>
-          <a:p>
-            <a:pPr marL="0" lvl="0" indent="0" algn="l" rtl="0">
-              <a:spcBef>
-                <a:spcPts val="0"/>
-              </a:spcBef>
-              <a:spcAft>
-                <a:spcPts val="0"/>
-              </a:spcAft>
-              <a:buNone/>
-            </a:pPr>
-            <a:endParaRPr/>
-          </a:p>
-        </p:txBody>
-      </p:sp>
-    </p:spTree>
-  </p:cSld>
-  <p:clrMapOvr>
-    <a:masterClrMapping/>
-  </p:clrMapOvr>
-</p:sld>
-</file>
-
-<file path=ppt/slides/slide3.xml><?xml version="1.0" encoding="utf-8"?>
-<p:sld xmlns:a="http://schemas.openxmlformats.org/drawingml/2006/main" xmlns:r="http://schemas.openxmlformats.org/officeDocument/2006/relationships" xmlns:p="http://schemas.openxmlformats.org/presentationml/2006/main">
-  <p:cSld>
-    <p:bg>
-      <p:bgPr>
-        <a:solidFill>
-          <a:srgbClr val="FFFFFF"/>
-        </a:solidFill>
-        <a:effectLst/>
-      </p:bgPr>
-    </p:bg>
-    <p:spTree>
-      <p:nvGrpSpPr>
-        <p:cNvPr id="1" name="Shape 24"/>
-        <p:cNvGrpSpPr/>
-        <p:nvPr/>
-      </p:nvGrpSpPr>
-      <p:grpSpPr>
-        <a:xfrm>
-          <a:off x="0" y="0"/>
-          <a:ext cx="0" cy="0"/>
-          <a:chOff x="0" y="0"/>
-          <a:chExt cx="0" cy="0"/>
-        </a:xfrm>
-      </p:grpSpPr>
-      <p:pic>
-        <p:nvPicPr>
-          <p:cNvPr id="2" name="Picture 2">
-            <a:extLst>
-              <a:ext uri="{FF2B5EF4-FFF2-40B4-BE49-F238E27FC236}">
-                <a16:creationId xmlns:a16="http://schemas.microsoft.com/office/drawing/2014/main" id="{47FE2B55-FF10-657C-68BD-C99BE4582480}"/>
-              </a:ext>
-            </a:extLst>
-          </p:cNvPr>
-          <p:cNvPicPr>
-            <a:picLocks noChangeAspect="1" noChangeArrowheads="1"/>
-          </p:cNvPicPr>
-          <p:nvPr/>
-        </p:nvPicPr>
-        <p:blipFill>
-          <a:blip r:embed="rId3">
-            <a:extLst>
-              <a:ext uri="{28A0092B-C50C-407E-A947-70E740481C1C}">
-                <a14:useLocalDpi xmlns:a14="http://schemas.microsoft.com/office/drawing/2010/main" val="0"/>
-              </a:ext>
-            </a:extLst>
-          </a:blip>
-          <a:srcRect/>
-          <a:stretch>
-            <a:fillRect/>
-          </a:stretch>
-        </p:blipFill>
-        <p:spPr bwMode="auto">
-          <a:xfrm>
-            <a:off x="18386747" y="0"/>
-            <a:ext cx="2345138" cy="1563425"/>
-          </a:xfrm>
-          <a:prstGeom prst="rect">
-            <a:avLst/>
-          </a:prstGeom>
-          <a:noFill/>
-          <a:extLst>
-            <a:ext uri="{909E8E84-426E-40DD-AFC4-6F175D3DCCD1}">
-              <a14:hiddenFill xmlns:a14="http://schemas.microsoft.com/office/drawing/2010/main">
-                <a:solidFill>
-                  <a:srgbClr val="FFFFFF"/>
-                </a:solidFill>
-              </a14:hiddenFill>
-            </a:ext>
-          </a:extLst>
-        </p:spPr>
-      </p:pic>
-      <p:pic>
-        <p:nvPicPr>
-          <p:cNvPr id="25" name="Google Shape;25;g3ca31053399_0_20" descr=" "/>
-          <p:cNvPicPr preferRelativeResize="0"/>
-          <p:nvPr/>
-        </p:nvPicPr>
-        <p:blipFill rotWithShape="1">
-          <a:blip r:embed="rId4">
-            <a:alphaModFix/>
-          </a:blip>
-          <a:srcRect/>
-          <a:stretch/>
-        </p:blipFill>
-        <p:spPr>
-          <a:xfrm>
-            <a:off x="12498685" y="9332149"/>
-            <a:ext cx="6324900" cy="5220774"/>
-          </a:xfrm>
-          <a:prstGeom prst="rect">
-            <a:avLst/>
-          </a:prstGeom>
-          <a:noFill/>
-          <a:ln>
-            <a:noFill/>
-          </a:ln>
-        </p:spPr>
-      </p:pic>
-      <p:pic>
-        <p:nvPicPr>
-          <p:cNvPr id="26" name="Google Shape;26;g3ca31053399_0_20" descr=" "/>
-          <p:cNvPicPr preferRelativeResize="0"/>
-          <p:nvPr/>
-        </p:nvPicPr>
-        <p:blipFill rotWithShape="1">
-          <a:blip r:embed="rId5">
-            <a:alphaModFix/>
-          </a:blip>
-          <a:srcRect/>
-          <a:stretch/>
-        </p:blipFill>
-        <p:spPr>
-          <a:xfrm>
-            <a:off x="14796618" y="1042904"/>
-            <a:ext cx="6591197" cy="7727137"/>
-          </a:xfrm>
-          <a:prstGeom prst="rect">
-            <a:avLst/>
-          </a:prstGeom>
-          <a:noFill/>
-          <a:ln>
-            <a:noFill/>
-          </a:ln>
-        </p:spPr>
-      </p:pic>
-      <p:sp>
-        <p:nvSpPr>
-          <p:cNvPr id="27" name="Google Shape;27;g3ca31053399_0_20"/>
-          <p:cNvSpPr/>
-          <p:nvPr/>
-        </p:nvSpPr>
-        <p:spPr>
-          <a:xfrm>
-            <a:off x="0" y="1193961"/>
-            <a:ext cx="21387900" cy="25500"/>
-          </a:xfrm>
-          <a:prstGeom prst="rect">
-            <a:avLst/>
-          </a:prstGeom>
-          <a:solidFill>
-            <a:srgbClr val="ED3237"/>
-          </a:solidFill>
-          <a:ln>
-            <a:noFill/>
-          </a:ln>
-        </p:spPr>
-        <p:txBody>
-          <a:bodyPr spcFirstLastPara="1" wrap="square" lIns="91425" tIns="91425" rIns="91425" bIns="91425" anchor="ctr" anchorCtr="0">
-            <a:noAutofit/>
-          </a:bodyPr>
-          <a:lstStyle/>
-          <a:p>
-            <a:pPr marL="0" lvl="0" indent="0" algn="l" rtl="0">
-              <a:spcBef>
-                <a:spcPts val="0"/>
-              </a:spcBef>
-              <a:spcAft>
-                <a:spcPts val="0"/>
-              </a:spcAft>
-              <a:buNone/>
-            </a:pPr>
-            <a:endParaRPr/>
-          </a:p>
-        </p:txBody>
-      </p:sp>
-      <p:sp>
-        <p:nvSpPr>
-          <p:cNvPr id="28" name="Google Shape;28;g3ca31053399_0_20"/>
-          <p:cNvSpPr/>
-          <p:nvPr/>
-        </p:nvSpPr>
-        <p:spPr>
-          <a:xfrm>
-            <a:off x="0" y="15115032"/>
-            <a:ext cx="21387900" cy="152400"/>
-          </a:xfrm>
-          <a:prstGeom prst="rect">
-            <a:avLst/>
-          </a:prstGeom>
-          <a:solidFill>
-            <a:srgbClr val="413E3C"/>
-          </a:solidFill>
-          <a:ln>
-            <a:noFill/>
-          </a:ln>
-        </p:spPr>
-        <p:txBody>
-          <a:bodyPr spcFirstLastPara="1" wrap="square" lIns="91425" tIns="91425" rIns="91425" bIns="91425" anchor="ctr" anchorCtr="0">
-            <a:noAutofit/>
-          </a:bodyPr>
-          <a:lstStyle/>
-          <a:p>
-            <a:pPr marL="0" lvl="0" indent="0" algn="l" rtl="0">
-              <a:spcBef>
-                <a:spcPts val="0"/>
-              </a:spcBef>
-              <a:spcAft>
-                <a:spcPts val="0"/>
-              </a:spcAft>
-              <a:buNone/>
-            </a:pPr>
-            <a:endParaRPr/>
-          </a:p>
-        </p:txBody>
-      </p:sp>
-      <p:pic>
-        <p:nvPicPr>
-          <p:cNvPr id="29" name="Google Shape;29;g3ca31053399_0_20" descr=" "/>
-          <p:cNvPicPr preferRelativeResize="0"/>
-          <p:nvPr/>
-        </p:nvPicPr>
-        <p:blipFill rotWithShape="1">
-          <a:blip r:embed="rId6">
-            <a:alphaModFix/>
-          </a:blip>
-          <a:srcRect/>
-          <a:stretch/>
-        </p:blipFill>
-        <p:spPr>
-          <a:xfrm>
-            <a:off x="17441655" y="192932"/>
-            <a:ext cx="1321886" cy="788994"/>
-          </a:xfrm>
-          <a:prstGeom prst="rect">
-            <a:avLst/>
-          </a:prstGeom>
-          <a:noFill/>
-          <a:ln>
-            <a:noFill/>
-          </a:ln>
-        </p:spPr>
-      </p:pic>
-      <p:pic>
-        <p:nvPicPr>
-          <p:cNvPr id="30" name="Google Shape;30;g3ca31053399_0_20" descr=" "/>
-          <p:cNvPicPr preferRelativeResize="0"/>
-          <p:nvPr/>
-        </p:nvPicPr>
-        <p:blipFill rotWithShape="1">
-          <a:blip r:embed="rId7">
-            <a:alphaModFix/>
-          </a:blip>
-          <a:srcRect/>
-          <a:stretch/>
-        </p:blipFill>
-        <p:spPr>
-          <a:xfrm>
-            <a:off x="774737" y="9629829"/>
-            <a:ext cx="5042140" cy="5156893"/>
-          </a:xfrm>
-          <a:prstGeom prst="rect">
-            <a:avLst/>
-          </a:prstGeom>
-          <a:noFill/>
-          <a:ln>
-            <a:noFill/>
-          </a:ln>
-        </p:spPr>
-      </p:pic>
-      <p:sp>
-        <p:nvSpPr>
-          <p:cNvPr id="31" name="Google Shape;31;g3ca31053399_0_20"/>
-          <p:cNvSpPr txBox="1"/>
-          <p:nvPr/>
-        </p:nvSpPr>
-        <p:spPr>
-          <a:xfrm>
-            <a:off x="1387225" y="186350"/>
-            <a:ext cx="6901500" cy="789000"/>
-          </a:xfrm>
-          <a:prstGeom prst="rect">
-            <a:avLst/>
-          </a:prstGeom>
-          <a:noFill/>
-          <a:ln>
-            <a:noFill/>
-          </a:ln>
-        </p:spPr>
-        <p:txBody>
-          <a:bodyPr spcFirstLastPara="1" wrap="square" lIns="91425" tIns="91425" rIns="91425" bIns="91425" anchor="t" anchorCtr="0">
-            <a:noAutofit/>
-          </a:bodyPr>
-          <a:lstStyle/>
-          <a:p>
-            <a:pPr marL="0" lvl="0" indent="0" algn="l" rtl="0">
-              <a:spcBef>
-                <a:spcPts val="0"/>
-              </a:spcBef>
-              <a:spcAft>
-                <a:spcPts val="0"/>
-              </a:spcAft>
-              <a:buNone/>
-            </a:pPr>
-            <a:r>
-              <a:rPr lang="en-US" sz="3000" dirty="0">
-                <a:latin typeface="Times New Roman" panose="02020603050405020304" pitchFamily="18" charset="0"/>
-                <a:cs typeface="Times New Roman" panose="02020603050405020304" pitchFamily="18" charset="0"/>
-              </a:rPr>
-              <a:t>SMART Question #1</a:t>
-            </a:r>
-            <a:endParaRPr sz="3000" dirty="0">
-              <a:latin typeface="Times New Roman" panose="02020603050405020304" pitchFamily="18" charset="0"/>
-              <a:cs typeface="Times New Roman" panose="02020603050405020304" pitchFamily="18" charset="0"/>
-            </a:endParaRPr>
-          </a:p>
-        </p:txBody>
-      </p:sp>
-      <p:sp>
-        <p:nvSpPr>
-          <p:cNvPr id="32" name="Google Shape;32;g3ca31053399_0_20"/>
-          <p:cNvSpPr txBox="1"/>
-          <p:nvPr/>
-        </p:nvSpPr>
-        <p:spPr>
-          <a:xfrm>
-            <a:off x="1387225" y="2912500"/>
-            <a:ext cx="18289200" cy="10801200"/>
-          </a:xfrm>
-          <a:prstGeom prst="rect">
-            <a:avLst/>
-          </a:prstGeom>
-          <a:noFill/>
-          <a:ln>
-            <a:noFill/>
-          </a:ln>
-        </p:spPr>
-        <p:txBody>
-          <a:bodyPr spcFirstLastPara="1" wrap="square" lIns="91425" tIns="91425" rIns="91425" bIns="91425" anchor="t" anchorCtr="0">
-            <a:noAutofit/>
-          </a:bodyPr>
-          <a:lstStyle/>
-          <a:p>
-            <a:pPr marL="0" lvl="0" indent="0" algn="l" rtl="0">
-              <a:spcBef>
-                <a:spcPts val="0"/>
-              </a:spcBef>
-              <a:spcAft>
-                <a:spcPts val="0"/>
-              </a:spcAft>
-              <a:buNone/>
-            </a:pPr>
-            <a:endParaRPr/>
-          </a:p>
-        </p:txBody>
-      </p:sp>
-    </p:spTree>
-  </p:cSld>
-  <p:clrMapOvr>
-    <a:masterClrMapping/>
-  </p:clrMapOvr>
-</p:sld>
-</file>
-
-<file path=ppt/slides/slide4.xml><?xml version="1.0" encoding="utf-8"?>
-<p:sld xmlns:a="http://schemas.openxmlformats.org/drawingml/2006/main" xmlns:r="http://schemas.openxmlformats.org/officeDocument/2006/relationships" xmlns:p="http://schemas.openxmlformats.org/presentationml/2006/main">
-  <p:cSld>
-    <p:bg>
-      <p:bgPr>
-        <a:solidFill>
-          <a:srgbClr val="FFFFFF"/>
-        </a:solidFill>
-        <a:effectLst/>
-      </p:bgPr>
-    </p:bg>
-    <p:spTree>
-      <p:nvGrpSpPr>
-        <p:cNvPr id="1" name="Shape 37"/>
-        <p:cNvGrpSpPr/>
-        <p:nvPr/>
-      </p:nvGrpSpPr>
-      <p:grpSpPr>
-        <a:xfrm>
-          <a:off x="0" y="0"/>
-          <a:ext cx="0" cy="0"/>
-          <a:chOff x="0" y="0"/>
-          <a:chExt cx="0" cy="0"/>
-        </a:xfrm>
-      </p:grpSpPr>
-      <p:pic>
-        <p:nvPicPr>
-          <p:cNvPr id="2" name="Picture 2">
-            <a:extLst>
-              <a:ext uri="{FF2B5EF4-FFF2-40B4-BE49-F238E27FC236}">
-                <a16:creationId xmlns:a16="http://schemas.microsoft.com/office/drawing/2014/main" id="{E55800E7-A9E7-80EF-2A0D-D3EEA248425D}"/>
-              </a:ext>
-            </a:extLst>
-          </p:cNvPr>
-          <p:cNvPicPr>
-            <a:picLocks noChangeAspect="1" noChangeArrowheads="1"/>
-          </p:cNvPicPr>
-          <p:nvPr/>
-        </p:nvPicPr>
-        <p:blipFill>
-          <a:blip r:embed="rId3">
-            <a:extLst>
-              <a:ext uri="{28A0092B-C50C-407E-A947-70E740481C1C}">
-                <a14:useLocalDpi xmlns:a14="http://schemas.microsoft.com/office/drawing/2010/main" val="0"/>
-              </a:ext>
-            </a:extLst>
-          </a:blip>
-          <a:srcRect/>
-          <a:stretch>
-            <a:fillRect/>
-          </a:stretch>
-        </p:blipFill>
-        <p:spPr bwMode="auto">
-          <a:xfrm>
-            <a:off x="18386747" y="0"/>
-            <a:ext cx="2345138" cy="1563425"/>
-          </a:xfrm>
-          <a:prstGeom prst="rect">
-            <a:avLst/>
-          </a:prstGeom>
-          <a:noFill/>
-          <a:extLst>
-            <a:ext uri="{909E8E84-426E-40DD-AFC4-6F175D3DCCD1}">
-              <a14:hiddenFill xmlns:a14="http://schemas.microsoft.com/office/drawing/2010/main">
-                <a:solidFill>
-                  <a:srgbClr val="FFFFFF"/>
-                </a:solidFill>
-              </a14:hiddenFill>
-            </a:ext>
-          </a:extLst>
-        </p:spPr>
-      </p:pic>
-      <p:pic>
-        <p:nvPicPr>
-          <p:cNvPr id="38" name="Google Shape;38;g3ca31053399_0_80" descr=" "/>
-          <p:cNvPicPr preferRelativeResize="0"/>
-          <p:nvPr/>
-        </p:nvPicPr>
-        <p:blipFill rotWithShape="1">
-          <a:blip r:embed="rId4">
-            <a:alphaModFix/>
-          </a:blip>
-          <a:srcRect/>
-          <a:stretch/>
-        </p:blipFill>
-        <p:spPr>
-          <a:xfrm>
-            <a:off x="12498685" y="9332149"/>
-            <a:ext cx="6324900" cy="5220774"/>
-          </a:xfrm>
-          <a:prstGeom prst="rect">
-            <a:avLst/>
-          </a:prstGeom>
-          <a:noFill/>
-          <a:ln>
-            <a:noFill/>
-          </a:ln>
-        </p:spPr>
-      </p:pic>
-      <p:pic>
-        <p:nvPicPr>
-          <p:cNvPr id="39" name="Google Shape;39;g3ca31053399_0_80" descr=" "/>
-          <p:cNvPicPr preferRelativeResize="0"/>
-          <p:nvPr/>
-        </p:nvPicPr>
-        <p:blipFill rotWithShape="1">
-          <a:blip r:embed="rId5">
-            <a:alphaModFix/>
-          </a:blip>
-          <a:srcRect/>
-          <a:stretch/>
-        </p:blipFill>
-        <p:spPr>
-          <a:xfrm>
-            <a:off x="14796618" y="1042904"/>
-            <a:ext cx="6591197" cy="7727137"/>
-          </a:xfrm>
-          <a:prstGeom prst="rect">
-            <a:avLst/>
-          </a:prstGeom>
-          <a:noFill/>
-          <a:ln>
-            <a:noFill/>
-          </a:ln>
-        </p:spPr>
-      </p:pic>
-      <p:sp>
-        <p:nvSpPr>
-          <p:cNvPr id="40" name="Google Shape;40;g3ca31053399_0_80"/>
-          <p:cNvSpPr/>
-          <p:nvPr/>
-        </p:nvSpPr>
-        <p:spPr>
-          <a:xfrm>
-            <a:off x="0" y="1193961"/>
-            <a:ext cx="21387900" cy="25500"/>
-          </a:xfrm>
-          <a:prstGeom prst="rect">
-            <a:avLst/>
-          </a:prstGeom>
-          <a:solidFill>
-            <a:srgbClr val="ED3237"/>
-          </a:solidFill>
-          <a:ln>
-            <a:noFill/>
-          </a:ln>
-        </p:spPr>
-        <p:txBody>
-          <a:bodyPr spcFirstLastPara="1" wrap="square" lIns="91425" tIns="91425" rIns="91425" bIns="91425" anchor="ctr" anchorCtr="0">
-            <a:noAutofit/>
-          </a:bodyPr>
-          <a:lstStyle/>
-          <a:p>
-            <a:pPr marL="0" lvl="0" indent="0" algn="l" rtl="0">
-              <a:spcBef>
-                <a:spcPts val="0"/>
-              </a:spcBef>
-              <a:spcAft>
-                <a:spcPts val="0"/>
-              </a:spcAft>
-              <a:buNone/>
-            </a:pPr>
-            <a:endParaRPr/>
-          </a:p>
-        </p:txBody>
-      </p:sp>
-      <p:sp>
-        <p:nvSpPr>
-          <p:cNvPr id="41" name="Google Shape;41;g3ca31053399_0_80"/>
-          <p:cNvSpPr/>
-          <p:nvPr/>
-        </p:nvSpPr>
-        <p:spPr>
-          <a:xfrm>
-            <a:off x="0" y="15115032"/>
-            <a:ext cx="21387900" cy="152400"/>
-          </a:xfrm>
-          <a:prstGeom prst="rect">
-            <a:avLst/>
-          </a:prstGeom>
-          <a:solidFill>
-            <a:srgbClr val="413E3C"/>
-          </a:solidFill>
-          <a:ln>
-            <a:noFill/>
-          </a:ln>
-        </p:spPr>
-        <p:txBody>
-          <a:bodyPr spcFirstLastPara="1" wrap="square" lIns="91425" tIns="91425" rIns="91425" bIns="91425" anchor="ctr" anchorCtr="0">
-            <a:noAutofit/>
-          </a:bodyPr>
-          <a:lstStyle/>
-          <a:p>
-            <a:pPr marL="0" lvl="0" indent="0" algn="l" rtl="0">
-              <a:spcBef>
-                <a:spcPts val="0"/>
-              </a:spcBef>
-              <a:spcAft>
-                <a:spcPts val="0"/>
-              </a:spcAft>
-              <a:buNone/>
-            </a:pPr>
-            <a:endParaRPr/>
-          </a:p>
-        </p:txBody>
-      </p:sp>
-      <p:pic>
-        <p:nvPicPr>
-          <p:cNvPr id="42" name="Google Shape;42;g3ca31053399_0_80" descr=" "/>
-          <p:cNvPicPr preferRelativeResize="0"/>
-          <p:nvPr/>
-        </p:nvPicPr>
-        <p:blipFill rotWithShape="1">
-          <a:blip r:embed="rId6">
-            <a:alphaModFix/>
-          </a:blip>
-          <a:srcRect/>
-          <a:stretch/>
-        </p:blipFill>
-        <p:spPr>
-          <a:xfrm>
-            <a:off x="17441655" y="192932"/>
-            <a:ext cx="1321886" cy="788994"/>
-          </a:xfrm>
-          <a:prstGeom prst="rect">
-            <a:avLst/>
-          </a:prstGeom>
-          <a:noFill/>
-          <a:ln>
-            <a:noFill/>
-          </a:ln>
-        </p:spPr>
-      </p:pic>
-      <p:pic>
-        <p:nvPicPr>
-          <p:cNvPr id="43" name="Google Shape;43;g3ca31053399_0_80" descr=" "/>
-          <p:cNvPicPr preferRelativeResize="0"/>
-          <p:nvPr/>
-        </p:nvPicPr>
-        <p:blipFill rotWithShape="1">
-          <a:blip r:embed="rId7">
-            <a:alphaModFix/>
-          </a:blip>
-          <a:srcRect/>
-          <a:stretch/>
-        </p:blipFill>
-        <p:spPr>
-          <a:xfrm>
-            <a:off x="774737" y="9629829"/>
-            <a:ext cx="5042140" cy="5156893"/>
-          </a:xfrm>
-          <a:prstGeom prst="rect">
-            <a:avLst/>
-          </a:prstGeom>
-          <a:noFill/>
-          <a:ln>
-            <a:noFill/>
-          </a:ln>
-        </p:spPr>
-      </p:pic>
-      <p:sp>
-        <p:nvSpPr>
-          <p:cNvPr id="44" name="Google Shape;44;g3ca31053399_0_80"/>
-          <p:cNvSpPr txBox="1"/>
-          <p:nvPr/>
-        </p:nvSpPr>
-        <p:spPr>
-          <a:xfrm>
-            <a:off x="1387225" y="186350"/>
-            <a:ext cx="6901500" cy="789000"/>
-          </a:xfrm>
-          <a:prstGeom prst="rect">
-            <a:avLst/>
-          </a:prstGeom>
-          <a:noFill/>
-          <a:ln>
-            <a:noFill/>
-          </a:ln>
-        </p:spPr>
-        <p:txBody>
-          <a:bodyPr spcFirstLastPara="1" wrap="square" lIns="91425" tIns="91425" rIns="91425" bIns="91425" anchor="t" anchorCtr="0">
-            <a:noAutofit/>
-          </a:bodyPr>
-          <a:lstStyle/>
-          <a:p>
-            <a:pPr lvl="0"/>
-            <a:r>
-              <a:rPr lang="en-US" sz="3000" dirty="0">
-                <a:latin typeface="Times New Roman" panose="02020603050405020304" pitchFamily="18" charset="0"/>
-                <a:cs typeface="Times New Roman" panose="02020603050405020304" pitchFamily="18" charset="0"/>
-              </a:rPr>
-              <a:t>SMART Question #2</a:t>
-            </a:r>
-          </a:p>
-        </p:txBody>
-      </p:sp>
-      <p:sp>
-        <p:nvSpPr>
-          <p:cNvPr id="45" name="Google Shape;45;g3ca31053399_0_80"/>
-          <p:cNvSpPr txBox="1"/>
-          <p:nvPr/>
-        </p:nvSpPr>
-        <p:spPr>
-          <a:xfrm>
-            <a:off x="1387225" y="2912500"/>
-            <a:ext cx="18289200" cy="10801200"/>
-          </a:xfrm>
-          <a:prstGeom prst="rect">
-            <a:avLst/>
-          </a:prstGeom>
-          <a:noFill/>
-          <a:ln>
-            <a:noFill/>
-          </a:ln>
-        </p:spPr>
-        <p:txBody>
-          <a:bodyPr spcFirstLastPara="1" wrap="square" lIns="91425" tIns="91425" rIns="91425" bIns="91425" anchor="t" anchorCtr="0">
-            <a:noAutofit/>
-          </a:bodyPr>
-          <a:lstStyle/>
-          <a:p>
-            <a:pPr marL="0" lvl="0" indent="0" algn="l" rtl="0">
-              <a:spcBef>
-                <a:spcPts val="0"/>
-              </a:spcBef>
-              <a:spcAft>
-                <a:spcPts val="0"/>
-              </a:spcAft>
-              <a:buNone/>
-            </a:pPr>
-            <a:endParaRPr/>
-          </a:p>
-        </p:txBody>
-      </p:sp>
-    </p:spTree>
-  </p:cSld>
-  <p:clrMapOvr>
-    <a:masterClrMapping/>
-  </p:clrMapOvr>
-</p:sld>
-</file>
-
-<file path=ppt/slides/slide5.xml><?xml version="1.0" encoding="utf-8"?>
-<p:sld xmlns:a="http://schemas.openxmlformats.org/drawingml/2006/main" xmlns:r="http://schemas.openxmlformats.org/officeDocument/2006/relationships" xmlns:p="http://schemas.openxmlformats.org/presentationml/2006/main">
-  <p:cSld>
-    <p:bg>
-      <p:bgPr>
-        <a:solidFill>
-          <a:srgbClr val="FFFFFF"/>
-        </a:solidFill>
-        <a:effectLst/>
-      </p:bgPr>
-    </p:bg>
-    <p:spTree>
-      <p:nvGrpSpPr>
-        <p:cNvPr id="1" name="Shape 50"/>
-        <p:cNvGrpSpPr/>
-        <p:nvPr/>
-      </p:nvGrpSpPr>
-      <p:grpSpPr>
-        <a:xfrm>
-          <a:off x="0" y="0"/>
-          <a:ext cx="0" cy="0"/>
-          <a:chOff x="0" y="0"/>
-          <a:chExt cx="0" cy="0"/>
-        </a:xfrm>
-      </p:grpSpPr>
-      <p:pic>
-        <p:nvPicPr>
-          <p:cNvPr id="2" name="Picture 2">
-            <a:extLst>
-              <a:ext uri="{FF2B5EF4-FFF2-40B4-BE49-F238E27FC236}">
-                <a16:creationId xmlns:a16="http://schemas.microsoft.com/office/drawing/2014/main" id="{2B5407FE-D665-B5F3-DD7B-01C4F85BD1C4}"/>
-              </a:ext>
-            </a:extLst>
-          </p:cNvPr>
-          <p:cNvPicPr>
-            <a:picLocks noChangeAspect="1" noChangeArrowheads="1"/>
-          </p:cNvPicPr>
-          <p:nvPr/>
-        </p:nvPicPr>
-        <p:blipFill>
-          <a:blip r:embed="rId3">
-            <a:extLst>
-              <a:ext uri="{28A0092B-C50C-407E-A947-70E740481C1C}">
-                <a14:useLocalDpi xmlns:a14="http://schemas.microsoft.com/office/drawing/2010/main" val="0"/>
-              </a:ext>
-            </a:extLst>
-          </a:blip>
-          <a:srcRect/>
-          <a:stretch>
-            <a:fillRect/>
-          </a:stretch>
-        </p:blipFill>
-        <p:spPr bwMode="auto">
-          <a:xfrm>
-            <a:off x="18386747" y="0"/>
-            <a:ext cx="2345138" cy="1563425"/>
-          </a:xfrm>
-          <a:prstGeom prst="rect">
-            <a:avLst/>
-          </a:prstGeom>
-          <a:noFill/>
-          <a:extLst>
-            <a:ext uri="{909E8E84-426E-40DD-AFC4-6F175D3DCCD1}">
-              <a14:hiddenFill xmlns:a14="http://schemas.microsoft.com/office/drawing/2010/main">
-                <a:solidFill>
-                  <a:srgbClr val="FFFFFF"/>
-                </a:solidFill>
-              </a14:hiddenFill>
-            </a:ext>
-          </a:extLst>
-        </p:spPr>
-      </p:pic>
-      <p:pic>
-        <p:nvPicPr>
-          <p:cNvPr id="51" name="Google Shape;51;g3ca31053399_0_44" descr=" "/>
-          <p:cNvPicPr preferRelativeResize="0"/>
-          <p:nvPr/>
-        </p:nvPicPr>
-        <p:blipFill rotWithShape="1">
-          <a:blip r:embed="rId4">
-            <a:alphaModFix/>
-          </a:blip>
-          <a:srcRect/>
-          <a:stretch/>
-        </p:blipFill>
-        <p:spPr>
-          <a:xfrm>
-            <a:off x="12498685" y="9332149"/>
-            <a:ext cx="6324900" cy="5220774"/>
-          </a:xfrm>
-          <a:prstGeom prst="rect">
-            <a:avLst/>
-          </a:prstGeom>
-          <a:noFill/>
-          <a:ln>
-            <a:noFill/>
-          </a:ln>
-        </p:spPr>
-      </p:pic>
-      <p:pic>
-        <p:nvPicPr>
-          <p:cNvPr id="52" name="Google Shape;52;g3ca31053399_0_44" descr=" "/>
-          <p:cNvPicPr preferRelativeResize="0"/>
-          <p:nvPr/>
-        </p:nvPicPr>
-        <p:blipFill rotWithShape="1">
-          <a:blip r:embed="rId5">
-            <a:alphaModFix/>
-          </a:blip>
-          <a:srcRect/>
-          <a:stretch/>
-        </p:blipFill>
-        <p:spPr>
-          <a:xfrm>
-            <a:off x="14796618" y="1042904"/>
-            <a:ext cx="6591197" cy="7727137"/>
-          </a:xfrm>
-          <a:prstGeom prst="rect">
-            <a:avLst/>
-          </a:prstGeom>
-          <a:noFill/>
-          <a:ln>
-            <a:noFill/>
-          </a:ln>
-        </p:spPr>
-      </p:pic>
-      <p:sp>
-        <p:nvSpPr>
-          <p:cNvPr id="53" name="Google Shape;53;g3ca31053399_0_44"/>
-          <p:cNvSpPr/>
-          <p:nvPr/>
-        </p:nvSpPr>
-        <p:spPr>
-          <a:xfrm>
-            <a:off x="0" y="1193961"/>
-            <a:ext cx="21387900" cy="25500"/>
-          </a:xfrm>
-          <a:prstGeom prst="rect">
-            <a:avLst/>
-          </a:prstGeom>
-          <a:solidFill>
-            <a:srgbClr val="ED3237"/>
-          </a:solidFill>
-          <a:ln>
-            <a:noFill/>
-          </a:ln>
-        </p:spPr>
-        <p:txBody>
-          <a:bodyPr spcFirstLastPara="1" wrap="square" lIns="91425" tIns="91425" rIns="91425" bIns="91425" anchor="ctr" anchorCtr="0">
-            <a:noAutofit/>
-          </a:bodyPr>
-          <a:lstStyle/>
-          <a:p>
-            <a:pPr marL="0" lvl="0" indent="0" algn="l" rtl="0">
-              <a:spcBef>
-                <a:spcPts val="0"/>
-              </a:spcBef>
-              <a:spcAft>
-                <a:spcPts val="0"/>
-              </a:spcAft>
-              <a:buNone/>
-            </a:pPr>
-            <a:endParaRPr/>
-          </a:p>
-        </p:txBody>
-      </p:sp>
-      <p:sp>
-        <p:nvSpPr>
-          <p:cNvPr id="54" name="Google Shape;54;g3ca31053399_0_44"/>
-          <p:cNvSpPr/>
-          <p:nvPr/>
-        </p:nvSpPr>
-        <p:spPr>
-          <a:xfrm>
-            <a:off x="0" y="15115032"/>
-            <a:ext cx="21387900" cy="152400"/>
-          </a:xfrm>
-          <a:prstGeom prst="rect">
-            <a:avLst/>
-          </a:prstGeom>
-          <a:solidFill>
-            <a:srgbClr val="413E3C"/>
-          </a:solidFill>
-          <a:ln>
-            <a:noFill/>
-          </a:ln>
-        </p:spPr>
-        <p:txBody>
-          <a:bodyPr spcFirstLastPara="1" wrap="square" lIns="91425" tIns="91425" rIns="91425" bIns="91425" anchor="ctr" anchorCtr="0">
-            <a:noAutofit/>
-          </a:bodyPr>
-          <a:lstStyle/>
-          <a:p>
-            <a:pPr marL="0" lvl="0" indent="0" algn="l" rtl="0">
-              <a:spcBef>
-                <a:spcPts val="0"/>
-              </a:spcBef>
-              <a:spcAft>
-                <a:spcPts val="0"/>
-              </a:spcAft>
-              <a:buNone/>
-            </a:pPr>
-            <a:endParaRPr/>
-          </a:p>
-        </p:txBody>
-      </p:sp>
-      <p:pic>
-        <p:nvPicPr>
-          <p:cNvPr id="55" name="Google Shape;55;g3ca31053399_0_44" descr=" "/>
-          <p:cNvPicPr preferRelativeResize="0"/>
-          <p:nvPr/>
-        </p:nvPicPr>
-        <p:blipFill rotWithShape="1">
-          <a:blip r:embed="rId6">
-            <a:alphaModFix/>
-          </a:blip>
-          <a:srcRect/>
-          <a:stretch/>
-        </p:blipFill>
-        <p:spPr>
-          <a:xfrm>
-            <a:off x="17441655" y="192932"/>
-            <a:ext cx="1321886" cy="788994"/>
-          </a:xfrm>
-          <a:prstGeom prst="rect">
-            <a:avLst/>
-          </a:prstGeom>
-          <a:noFill/>
-          <a:ln>
-            <a:noFill/>
-          </a:ln>
-        </p:spPr>
-      </p:pic>
-      <p:pic>
-        <p:nvPicPr>
-          <p:cNvPr id="56" name="Google Shape;56;g3ca31053399_0_44" descr=" "/>
-          <p:cNvPicPr preferRelativeResize="0"/>
-          <p:nvPr/>
-        </p:nvPicPr>
-        <p:blipFill rotWithShape="1">
-          <a:blip r:embed="rId7">
-            <a:alphaModFix/>
-          </a:blip>
-          <a:srcRect/>
-          <a:stretch/>
-        </p:blipFill>
-        <p:spPr>
-          <a:xfrm>
-            <a:off x="774737" y="9629829"/>
-            <a:ext cx="5042140" cy="5156893"/>
-          </a:xfrm>
-          <a:prstGeom prst="rect">
-            <a:avLst/>
-          </a:prstGeom>
-          <a:noFill/>
-          <a:ln>
-            <a:noFill/>
-          </a:ln>
-        </p:spPr>
-      </p:pic>
-      <p:sp>
-        <p:nvSpPr>
-          <p:cNvPr id="57" name="Google Shape;57;g3ca31053399_0_44"/>
-          <p:cNvSpPr txBox="1"/>
-          <p:nvPr/>
-        </p:nvSpPr>
-        <p:spPr>
-          <a:xfrm>
-            <a:off x="1387225" y="186350"/>
-            <a:ext cx="6901500" cy="789000"/>
-          </a:xfrm>
-          <a:prstGeom prst="rect">
-            <a:avLst/>
-          </a:prstGeom>
-          <a:noFill/>
-          <a:ln>
-            <a:noFill/>
-          </a:ln>
-        </p:spPr>
-        <p:txBody>
-          <a:bodyPr spcFirstLastPara="1" wrap="square" lIns="91425" tIns="91425" rIns="91425" bIns="91425" anchor="t" anchorCtr="0">
-            <a:noAutofit/>
-          </a:bodyPr>
-          <a:lstStyle/>
-          <a:p>
-            <a:pPr lvl="0"/>
-            <a:r>
-              <a:rPr lang="en-US" sz="3000" dirty="0">
-                <a:latin typeface="Times New Roman" panose="02020603050405020304" pitchFamily="18" charset="0"/>
-                <a:cs typeface="Times New Roman" panose="02020603050405020304" pitchFamily="18" charset="0"/>
-              </a:rPr>
-              <a:t>SMART Question #3</a:t>
-            </a:r>
-          </a:p>
-        </p:txBody>
-      </p:sp>
-      <p:sp>
-        <p:nvSpPr>
-          <p:cNvPr id="58" name="Google Shape;58;g3ca31053399_0_44"/>
-          <p:cNvSpPr txBox="1"/>
-          <p:nvPr/>
-        </p:nvSpPr>
-        <p:spPr>
-          <a:xfrm>
-            <a:off x="1549350" y="2967364"/>
-            <a:ext cx="18289200" cy="10801200"/>
-          </a:xfrm>
-          <a:prstGeom prst="rect">
-            <a:avLst/>
-          </a:prstGeom>
-          <a:noFill/>
-          <a:ln>
-            <a:noFill/>
-          </a:ln>
-        </p:spPr>
-        <p:txBody>
-          <a:bodyPr spcFirstLastPara="1" wrap="square" lIns="91425" tIns="91425" rIns="91425" bIns="91425" anchor="t" anchorCtr="0">
-            <a:noAutofit/>
-          </a:bodyPr>
-          <a:lstStyle/>
-          <a:p>
-            <a:pPr marL="0" lvl="0" indent="0" algn="l" rtl="0">
-              <a:spcBef>
-                <a:spcPts val="0"/>
-              </a:spcBef>
-              <a:spcAft>
-                <a:spcPts val="0"/>
-              </a:spcAft>
-              <a:buNone/>
-            </a:pPr>
-            <a:endParaRPr/>
-          </a:p>
-        </p:txBody>
-      </p:sp>
-    </p:spTree>
-  </p:cSld>
-  <p:clrMapOvr>
-    <a:masterClrMapping/>
-  </p:clrMapOvr>
-</p:sld>
-</file>
-
-<file path=ppt/slides/slide6.xml><?xml version="1.0" encoding="utf-8"?>
 <p:sld xmlns:a="http://schemas.openxmlformats.org/drawingml/2006/main" xmlns:r="http://schemas.openxmlformats.org/officeDocument/2006/relationships" xmlns:p="http://schemas.openxmlformats.org/presentationml/2006/main">
   <p:cSld>
     <p:spTree>
@@ -6125,7 +3790,7 @@
         <p:spPr>
           <a:xfrm>
             <a:off x="1994561" y="10685205"/>
-            <a:ext cx="16411863" cy="4031873"/>
+            <a:ext cx="16411863" cy="4524315"/>
           </a:xfrm>
           <a:prstGeom prst="rect">
             <a:avLst/>
@@ -6166,7 +3831,7 @@
                 <a:latin typeface="Times New Roman" panose="02020603050405020304" pitchFamily="18" charset="0"/>
                 <a:cs typeface="Times New Roman" panose="02020603050405020304" pitchFamily="18" charset="0"/>
               </a:rPr>
-              <a:t>: A 1% increase in interest rate multiplies the odds of default by 1.0881, holding all else constant.</a:t>
+              <a:t>: A one-unit increase in interest rate increases the odds of default by 1.0881, holding all else constant</a:t>
             </a:r>
           </a:p>
           <a:p>
@@ -6186,7 +3851,7 @@
                 <a:latin typeface="Times New Roman" panose="02020603050405020304" pitchFamily="18" charset="0"/>
                 <a:cs typeface="Times New Roman" panose="02020603050405020304" pitchFamily="18" charset="0"/>
               </a:rPr>
-              <a:t>: The R-Squared value = 0.3632. 36.32% of the model is explain by training set.</a:t>
+              <a:t>: The R-Squared value = 0.3632. 36.32% of the model is explained by the training set</a:t>
             </a:r>
           </a:p>
           <a:p>
@@ -6206,7 +3871,7 @@
                 <a:latin typeface="Times New Roman" panose="02020603050405020304" pitchFamily="18" charset="0"/>
                 <a:cs typeface="Times New Roman" panose="02020603050405020304" pitchFamily="18" charset="0"/>
               </a:rPr>
-              <a:t> 54.19%. Slightly above average.</a:t>
+              <a:t> 54.19%. Slightly above average</a:t>
             </a:r>
           </a:p>
           <a:p>
@@ -6226,7 +3891,7 @@
                 <a:latin typeface="Times New Roman" panose="02020603050405020304" pitchFamily="18" charset="0"/>
                 <a:cs typeface="Times New Roman" panose="02020603050405020304" pitchFamily="18" charset="0"/>
               </a:rPr>
-              <a:t> 95.32%. This is a high perhaps because the method is a logistic regression. </a:t>
+              <a:t> 95.32%. This is a high perhaps because the method is a logistic regression </a:t>
             </a:r>
           </a:p>
           <a:p>
@@ -6246,7 +3911,7 @@
                 <a:latin typeface="Times New Roman" panose="02020603050405020304" pitchFamily="18" charset="0"/>
                 <a:cs typeface="Times New Roman" panose="02020603050405020304" pitchFamily="18" charset="0"/>
               </a:rPr>
-              <a:t> = 85.93%. This is an excellent/good performance.</a:t>
+              <a:t> = 85.93%. This is an excellent/good performance</a:t>
             </a:r>
           </a:p>
           <a:p>
@@ -6386,7 +4051,7 @@
 </p:sld>
 </file>
 
-<file path=ppt/slides/slide7.xml><?xml version="1.0" encoding="utf-8"?>
+<file path=ppt/slides/slide3.xml><?xml version="1.0" encoding="utf-8"?>
 <p:sld xmlns:a="http://schemas.openxmlformats.org/drawingml/2006/main" xmlns:r="http://schemas.openxmlformats.org/officeDocument/2006/relationships" xmlns:p="http://schemas.openxmlformats.org/presentationml/2006/main">
   <p:cSld>
     <p:spTree>
@@ -6411,6 +4076,36 @@
       </p:grpSpPr>
       <p:pic>
         <p:nvPicPr>
+          <p:cNvPr id="14" name="Picture 13">
+            <a:extLst>
+              <a:ext uri="{FF2B5EF4-FFF2-40B4-BE49-F238E27FC236}">
+                <a16:creationId xmlns:a16="http://schemas.microsoft.com/office/drawing/2014/main" id="{FC7BD0DB-E6D2-AD5F-523F-511FC804B73E}"/>
+              </a:ext>
+            </a:extLst>
+          </p:cNvPr>
+          <p:cNvPicPr>
+            <a:picLocks noChangeAspect="1"/>
+          </p:cNvPicPr>
+          <p:nvPr/>
+        </p:nvPicPr>
+        <p:blipFill>
+          <a:blip r:embed="rId3"/>
+          <a:stretch>
+            <a:fillRect/>
+          </a:stretch>
+        </p:blipFill>
+        <p:spPr>
+          <a:xfrm>
+            <a:off x="10693950" y="2556042"/>
+            <a:ext cx="10330086" cy="7211811"/>
+          </a:xfrm>
+          <a:prstGeom prst="rect">
+            <a:avLst/>
+          </a:prstGeom>
+        </p:spPr>
+      </p:pic>
+      <p:pic>
+        <p:nvPicPr>
           <p:cNvPr id="2" name="Picture 2">
             <a:extLst>
               <a:ext uri="{FF2B5EF4-FFF2-40B4-BE49-F238E27FC236}">
@@ -6424,7 +4119,7 @@
           <p:nvPr/>
         </p:nvPicPr>
         <p:blipFill>
-          <a:blip r:embed="rId3">
+          <a:blip r:embed="rId4">
             <a:extLst>
               <a:ext uri="{28A0092B-C50C-407E-A947-70E740481C1C}">
                 <a14:useLocalDpi xmlns:a14="http://schemas.microsoft.com/office/drawing/2010/main" val="0"/>
@@ -6469,7 +4164,7 @@
           <p:nvPr/>
         </p:nvPicPr>
         <p:blipFill rotWithShape="1">
-          <a:blip r:embed="rId4">
+          <a:blip r:embed="rId5">
             <a:alphaModFix/>
           </a:blip>
           <a:srcRect/>
@@ -6587,39 +4282,6 @@
             <a:extLst>
               <a:ext uri="{FF2B5EF4-FFF2-40B4-BE49-F238E27FC236}">
                 <a16:creationId xmlns:a16="http://schemas.microsoft.com/office/drawing/2014/main" id="{04B1108E-5F05-135E-89A6-AEC1A61B67B7}"/>
-              </a:ext>
-            </a:extLst>
-          </p:cNvPr>
-          <p:cNvPicPr preferRelativeResize="0"/>
-          <p:nvPr/>
-        </p:nvPicPr>
-        <p:blipFill rotWithShape="1">
-          <a:blip r:embed="rId5">
-            <a:alphaModFix/>
-          </a:blip>
-          <a:srcRect/>
-          <a:stretch/>
-        </p:blipFill>
-        <p:spPr>
-          <a:xfrm>
-            <a:off x="17441655" y="192932"/>
-            <a:ext cx="1321886" cy="788994"/>
-          </a:xfrm>
-          <a:prstGeom prst="rect">
-            <a:avLst/>
-          </a:prstGeom>
-          <a:noFill/>
-          <a:ln>
-            <a:noFill/>
-          </a:ln>
-        </p:spPr>
-      </p:pic>
-      <p:pic>
-        <p:nvPicPr>
-          <p:cNvPr id="69" name="Google Shape;69;g3ca31053399_0_56" descr=" ">
-            <a:extLst>
-              <a:ext uri="{FF2B5EF4-FFF2-40B4-BE49-F238E27FC236}">
-                <a16:creationId xmlns:a16="http://schemas.microsoft.com/office/drawing/2014/main" id="{213F664B-40EF-3A0E-5EF6-A20057EC1C48}"/>
               </a:ext>
             </a:extLst>
           </p:cNvPr>
@@ -6635,6 +4297,39 @@
         </p:blipFill>
         <p:spPr>
           <a:xfrm>
+            <a:off x="17441655" y="192932"/>
+            <a:ext cx="1321886" cy="788994"/>
+          </a:xfrm>
+          <a:prstGeom prst="rect">
+            <a:avLst/>
+          </a:prstGeom>
+          <a:noFill/>
+          <a:ln>
+            <a:noFill/>
+          </a:ln>
+        </p:spPr>
+      </p:pic>
+      <p:pic>
+        <p:nvPicPr>
+          <p:cNvPr id="69" name="Google Shape;69;g3ca31053399_0_56" descr=" ">
+            <a:extLst>
+              <a:ext uri="{FF2B5EF4-FFF2-40B4-BE49-F238E27FC236}">
+                <a16:creationId xmlns:a16="http://schemas.microsoft.com/office/drawing/2014/main" id="{213F664B-40EF-3A0E-5EF6-A20057EC1C48}"/>
+              </a:ext>
+            </a:extLst>
+          </p:cNvPr>
+          <p:cNvPicPr preferRelativeResize="0"/>
+          <p:nvPr/>
+        </p:nvPicPr>
+        <p:blipFill rotWithShape="1">
+          <a:blip r:embed="rId7">
+            <a:alphaModFix/>
+          </a:blip>
+          <a:srcRect/>
+          <a:stretch/>
+        </p:blipFill>
+        <p:spPr>
+          <a:xfrm>
             <a:off x="774737" y="9629829"/>
             <a:ext cx="5042140" cy="5156893"/>
           </a:xfrm>
@@ -6685,7 +4380,7 @@
                   <a:srgbClr val="FF0000"/>
                 </a:solidFill>
               </a:rPr>
-              <a:t>Decision Tree</a:t>
+              <a:t>Classification Tree</a:t>
             </a:r>
             <a:endParaRPr lang="en-US" sz="3600" b="1" dirty="0">
               <a:solidFill>
@@ -6722,7 +4417,7 @@
         <p:spPr>
           <a:xfrm>
             <a:off x="2564803" y="11015258"/>
-            <a:ext cx="17490163" cy="3046988"/>
+            <a:ext cx="17490163" cy="3539430"/>
           </a:xfrm>
           <a:prstGeom prst="rect">
             <a:avLst/>
@@ -6745,6 +4440,37 @@
               </a:rPr>
               <a:t>Decision Tree Metrics:</a:t>
             </a:r>
+          </a:p>
+          <a:p>
+            <a:pPr marL="457200" indent="-457200">
+              <a:buFont typeface="Arial" panose="020B0604020202020204" pitchFamily="34" charset="0"/>
+              <a:buChar char="•"/>
+            </a:pPr>
+            <a:r>
+              <a:rPr lang="en-US" sz="3200" b="1" dirty="0">
+                <a:latin typeface="Times New Roman" panose="02020603050405020304" pitchFamily="18" charset="0"/>
+                <a:cs typeface="Times New Roman" panose="02020603050405020304" pitchFamily="18" charset="0"/>
+              </a:rPr>
+              <a:t>Variable Importance: </a:t>
+            </a:r>
+            <a:r>
+              <a:rPr lang="en-US" sz="3200" dirty="0" err="1">
+                <a:latin typeface="Times New Roman" panose="02020603050405020304" pitchFamily="18" charset="0"/>
+                <a:cs typeface="Times New Roman" panose="02020603050405020304" pitchFamily="18" charset="0"/>
+              </a:rPr>
+              <a:t>loan_int_rate</a:t>
+            </a:r>
+            <a:r>
+              <a:rPr lang="en-US" sz="3200" dirty="0">
+                <a:latin typeface="Times New Roman" panose="02020603050405020304" pitchFamily="18" charset="0"/>
+                <a:cs typeface="Times New Roman" panose="02020603050405020304" pitchFamily="18" charset="0"/>
+              </a:rPr>
+              <a:t> is the 4th most important</a:t>
+            </a:r>
+            <a:endParaRPr lang="en-US" sz="3200" b="1" dirty="0">
+              <a:latin typeface="Times New Roman" panose="02020603050405020304" pitchFamily="18" charset="0"/>
+              <a:cs typeface="Times New Roman" panose="02020603050405020304" pitchFamily="18" charset="0"/>
+            </a:endParaRPr>
           </a:p>
           <a:p>
             <a:pPr marL="457200" indent="-457200">
@@ -6763,7 +4489,7 @@
                 <a:latin typeface="Times New Roman" panose="02020603050405020304" pitchFamily="18" charset="0"/>
                 <a:cs typeface="Times New Roman" panose="02020603050405020304" pitchFamily="18" charset="0"/>
               </a:rPr>
-              <a:t> 0.000540. The model is relatively complex. </a:t>
+              <a:t> 0.000540. The model is relatively complex </a:t>
             </a:r>
           </a:p>
           <a:p>
@@ -6783,7 +4509,7 @@
                 <a:latin typeface="Times New Roman" panose="02020603050405020304" pitchFamily="18" charset="0"/>
                 <a:cs typeface="Times New Roman" panose="02020603050405020304" pitchFamily="18" charset="0"/>
               </a:rPr>
-              <a:t> 70.57%. Higher than the logistic regression model.</a:t>
+              <a:t> 70.57%. Higher than the logistic regression model</a:t>
             </a:r>
           </a:p>
           <a:p>
@@ -6803,7 +4529,7 @@
                 <a:latin typeface="Times New Roman" panose="02020603050405020304" pitchFamily="18" charset="0"/>
                 <a:cs typeface="Times New Roman" panose="02020603050405020304" pitchFamily="18" charset="0"/>
               </a:rPr>
-              <a:t> 99.55%. Very high, could be because it is a single decision tree.</a:t>
+              <a:t> 99.55%. Very high, could be because it is a single decision tree</a:t>
             </a:r>
           </a:p>
           <a:p>
@@ -6823,7 +4549,7 @@
                 <a:latin typeface="Times New Roman" panose="02020603050405020304" pitchFamily="18" charset="0"/>
                 <a:cs typeface="Times New Roman" panose="02020603050405020304" pitchFamily="18" charset="0"/>
               </a:rPr>
-              <a:t> = 90.32%. This is an outstanding/perfect performance.</a:t>
+              <a:t> = 90.32%. This is an outstanding/perfect performance</a:t>
             </a:r>
           </a:p>
           <a:p>
@@ -6897,10 +4623,10 @@
       </p:sp>
       <p:pic>
         <p:nvPicPr>
-          <p:cNvPr id="4" name="Picture 3">
-            <a:extLst>
-              <a:ext uri="{FF2B5EF4-FFF2-40B4-BE49-F238E27FC236}">
-                <a16:creationId xmlns:a16="http://schemas.microsoft.com/office/drawing/2014/main" id="{831F7DD0-A063-4C3A-65A6-8BE7FD558142}"/>
+          <p:cNvPr id="12" name="Picture 11">
+            <a:extLst>
+              <a:ext uri="{FF2B5EF4-FFF2-40B4-BE49-F238E27FC236}">
+                <a16:creationId xmlns:a16="http://schemas.microsoft.com/office/drawing/2014/main" id="{6ACEBC88-7765-E355-7B40-83763E49CEBA}"/>
               </a:ext>
             </a:extLst>
           </p:cNvPr>
@@ -6910,46 +4636,15 @@
           <p:nvPr/>
         </p:nvPicPr>
         <p:blipFill>
-          <a:blip r:embed="rId7"/>
+          <a:blip r:embed="rId8"/>
           <a:stretch>
             <a:fillRect/>
           </a:stretch>
         </p:blipFill>
         <p:spPr>
           <a:xfrm>
-            <a:off x="11371482" y="2616211"/>
-            <a:ext cx="9135403" cy="6785645"/>
-          </a:xfrm>
-          <a:prstGeom prst="rect">
-            <a:avLst/>
-          </a:prstGeom>
-        </p:spPr>
-      </p:pic>
-      <p:pic>
-        <p:nvPicPr>
-          <p:cNvPr id="9" name="Picture 8">
-            <a:extLst>
-              <a:ext uri="{FF2B5EF4-FFF2-40B4-BE49-F238E27FC236}">
-                <a16:creationId xmlns:a16="http://schemas.microsoft.com/office/drawing/2014/main" id="{EA5E1A96-D33C-3088-1667-DDB952ABD95A}"/>
-              </a:ext>
-            </a:extLst>
-          </p:cNvPr>
-          <p:cNvPicPr>
-            <a:picLocks noChangeAspect="1"/>
-          </p:cNvPicPr>
-          <p:nvPr/>
-        </p:nvPicPr>
-        <p:blipFill>
-          <a:blip r:embed="rId8"/>
-          <a:srcRect r="16775" b="9124"/>
-          <a:stretch>
-            <a:fillRect/>
-          </a:stretch>
-        </p:blipFill>
-        <p:spPr>
-          <a:xfrm>
-            <a:off x="652329" y="2708654"/>
-            <a:ext cx="10329096" cy="5842889"/>
+            <a:off x="1062205" y="2719891"/>
+            <a:ext cx="9509344" cy="7047962"/>
           </a:xfrm>
           <a:prstGeom prst="rect">
             <a:avLst/>
@@ -6969,7 +4664,7 @@
 </p:sld>
 </file>
 
-<file path=ppt/slides/slide8.xml><?xml version="1.0" encoding="utf-8"?>
+<file path=ppt/slides/slide4.xml><?xml version="1.0" encoding="utf-8"?>
 <p:sld xmlns:a="http://schemas.openxmlformats.org/drawingml/2006/main" xmlns:r="http://schemas.openxmlformats.org/officeDocument/2006/relationships" xmlns:p="http://schemas.openxmlformats.org/presentationml/2006/main">
   <p:cSld>
     <p:spTree>
@@ -7307,8 +5002,8 @@
         </p:nvSpPr>
         <p:spPr>
           <a:xfrm>
-            <a:off x="1989668" y="10501660"/>
-            <a:ext cx="16421649" cy="3539430"/>
+            <a:off x="1268256" y="4600126"/>
+            <a:ext cx="7736596" cy="4524315"/>
           </a:xfrm>
           <a:prstGeom prst="rect">
             <a:avLst/>
@@ -7330,66 +5025,6 @@
                 <a:cs typeface="Times New Roman" panose="02020603050405020304" pitchFamily="18" charset="0"/>
               </a:rPr>
               <a:t>Random Forest Metrics:</a:t>
-            </a:r>
-          </a:p>
-          <a:p>
-            <a:pPr marL="457200" indent="-457200">
-              <a:buFont typeface="Arial" panose="020B0604020202020204" pitchFamily="34" charset="0"/>
-              <a:buChar char="•"/>
-            </a:pPr>
-            <a:r>
-              <a:rPr lang="en-US" sz="3200" b="1" dirty="0">
-                <a:latin typeface="Times New Roman" panose="02020603050405020304" pitchFamily="18" charset="0"/>
-                <a:cs typeface="Times New Roman" panose="02020603050405020304" pitchFamily="18" charset="0"/>
-              </a:rPr>
-              <a:t>Sensitivity =</a:t>
-            </a:r>
-            <a:r>
-              <a:rPr lang="en-US" sz="3200" dirty="0">
-                <a:latin typeface="Times New Roman" panose="02020603050405020304" pitchFamily="18" charset="0"/>
-                <a:cs typeface="Times New Roman" panose="02020603050405020304" pitchFamily="18" charset="0"/>
-              </a:rPr>
-              <a:t> 70.97%. Slightly higher than the decision tree model.</a:t>
-            </a:r>
-          </a:p>
-          <a:p>
-            <a:pPr marL="457200" indent="-457200">
-              <a:buFont typeface="Arial" panose="020B0604020202020204" pitchFamily="34" charset="0"/>
-              <a:buChar char="•"/>
-            </a:pPr>
-            <a:r>
-              <a:rPr lang="en-US" sz="3200" b="1" dirty="0">
-                <a:latin typeface="Times New Roman" panose="02020603050405020304" pitchFamily="18" charset="0"/>
-                <a:cs typeface="Times New Roman" panose="02020603050405020304" pitchFamily="18" charset="0"/>
-              </a:rPr>
-              <a:t>Specificity =</a:t>
-            </a:r>
-            <a:r>
-              <a:rPr lang="en-US" sz="3200" dirty="0">
-                <a:latin typeface="Times New Roman" panose="02020603050405020304" pitchFamily="18" charset="0"/>
-                <a:cs typeface="Times New Roman" panose="02020603050405020304" pitchFamily="18" charset="0"/>
-              </a:rPr>
-              <a:t> 99.60%. Very high, could be because 78% of the borrowers are non-defaults.</a:t>
-            </a:r>
-          </a:p>
-          <a:p>
-            <a:pPr marL="457200" indent="-457200">
-              <a:buFont typeface="Arial" panose="020B0604020202020204" pitchFamily="34" charset="0"/>
-              <a:buChar char="•"/>
-            </a:pPr>
-            <a:r>
-              <a:rPr lang="en-US" sz="3200" b="1" dirty="0">
-                <a:latin typeface="Times New Roman" panose="02020603050405020304" pitchFamily="18" charset="0"/>
-                <a:cs typeface="Times New Roman" panose="02020603050405020304" pitchFamily="18" charset="0"/>
-              </a:rPr>
-              <a:t>AUC</a:t>
-            </a:r>
-            <a:r>
-              <a:rPr lang="en-US" sz="3200" dirty="0">
-                <a:latin typeface="Times New Roman" panose="02020603050405020304" pitchFamily="18" charset="0"/>
-                <a:cs typeface="Times New Roman" panose="02020603050405020304" pitchFamily="18" charset="0"/>
-              </a:rPr>
-              <a:t> = 93.1%. This is an outstanding/perfect performance. </a:t>
             </a:r>
           </a:p>
           <a:p>
@@ -7409,7 +5044,7 @@
                 <a:latin typeface="Times New Roman" panose="02020603050405020304" pitchFamily="18" charset="0"/>
                 <a:cs typeface="Times New Roman" panose="02020603050405020304" pitchFamily="18" charset="0"/>
               </a:rPr>
-              <a:t>measures a feature’s importance by calculating the drop in model accuracy when that feature’s values are randomly shuffled</a:t>
+              <a:t>Even though interest rate is used to make splits, the model can still predict the outcome almost as well without it</a:t>
             </a:r>
             <a:endParaRPr lang="en-US" sz="3200" b="1" dirty="0">
               <a:latin typeface="Times New Roman" panose="02020603050405020304" pitchFamily="18" charset="0"/>
@@ -7433,7 +5068,34 @@
                 <a:latin typeface="Times New Roman" panose="02020603050405020304" pitchFamily="18" charset="0"/>
                 <a:cs typeface="Times New Roman" panose="02020603050405020304" pitchFamily="18" charset="0"/>
               </a:rPr>
-              <a:t>measures the total reduction in node impurity</a:t>
+              <a:t>Interest rate is frequently used for splits across many trees</a:t>
+            </a:r>
+          </a:p>
+          <a:p>
+            <a:pPr marL="457200" indent="-457200">
+              <a:buFont typeface="Arial" panose="020B0604020202020204" pitchFamily="34" charset="0"/>
+              <a:buChar char="•"/>
+            </a:pPr>
+            <a:r>
+              <a:rPr lang="en-US" sz="3200" b="1" dirty="0">
+                <a:latin typeface="Times New Roman" panose="02020603050405020304" pitchFamily="18" charset="0"/>
+                <a:cs typeface="Times New Roman" panose="02020603050405020304" pitchFamily="18" charset="0"/>
+              </a:rPr>
+              <a:t>Summary: </a:t>
+            </a:r>
+            <a:r>
+              <a:rPr lang="en-US" sz="3200" dirty="0" err="1">
+                <a:latin typeface="Times New Roman" panose="02020603050405020304" pitchFamily="18" charset="0"/>
+                <a:cs typeface="Times New Roman" panose="02020603050405020304" pitchFamily="18" charset="0"/>
+              </a:rPr>
+              <a:t>loan_int_rate</a:t>
+            </a:r>
+            <a:r>
+              <a:rPr lang="en-US" sz="3200" dirty="0">
+                <a:latin typeface="Times New Roman" panose="02020603050405020304" pitchFamily="18" charset="0"/>
+                <a:cs typeface="Times New Roman" panose="02020603050405020304" pitchFamily="18" charset="0"/>
+              </a:rPr>
+              <a:t> might have a relationship to other variables</a:t>
             </a:r>
             <a:endParaRPr lang="en-US" sz="3200" b="1" dirty="0">
               <a:latin typeface="Times New Roman" panose="02020603050405020304" pitchFamily="18" charset="0"/>
@@ -7502,10 +5164,10 @@
       </p:sp>
       <p:pic>
         <p:nvPicPr>
-          <p:cNvPr id="4" name="Picture 3">
-            <a:extLst>
-              <a:ext uri="{FF2B5EF4-FFF2-40B4-BE49-F238E27FC236}">
-                <a16:creationId xmlns:a16="http://schemas.microsoft.com/office/drawing/2014/main" id="{88A6ACBB-168B-F23D-62AF-CA8775B10161}"/>
+          <p:cNvPr id="6" name="Picture 5">
+            <a:extLst>
+              <a:ext uri="{FF2B5EF4-FFF2-40B4-BE49-F238E27FC236}">
+                <a16:creationId xmlns:a16="http://schemas.microsoft.com/office/drawing/2014/main" id="{69905E92-678A-E79A-8DCB-F4336D1C7D4A}"/>
               </a:ext>
             </a:extLst>
           </p:cNvPr>
@@ -7522,38 +5184,8 @@
         </p:blipFill>
         <p:spPr>
           <a:xfrm>
-            <a:off x="13018594" y="2193879"/>
-            <a:ext cx="6380126" cy="8335774"/>
-          </a:xfrm>
-          <a:prstGeom prst="rect">
-            <a:avLst/>
-          </a:prstGeom>
-        </p:spPr>
-      </p:pic>
-      <p:pic>
-        <p:nvPicPr>
-          <p:cNvPr id="6" name="Picture 5">
-            <a:extLst>
-              <a:ext uri="{FF2B5EF4-FFF2-40B4-BE49-F238E27FC236}">
-                <a16:creationId xmlns:a16="http://schemas.microsoft.com/office/drawing/2014/main" id="{69905E92-678A-E79A-8DCB-F4336D1C7D4A}"/>
-              </a:ext>
-            </a:extLst>
-          </p:cNvPr>
-          <p:cNvPicPr>
-            <a:picLocks noChangeAspect="1"/>
-          </p:cNvPicPr>
-          <p:nvPr/>
-        </p:nvPicPr>
-        <p:blipFill>
-          <a:blip r:embed="rId8"/>
-          <a:stretch>
-            <a:fillRect/>
-          </a:stretch>
-        </p:blipFill>
-        <p:spPr>
-          <a:xfrm>
-            <a:off x="774737" y="2193879"/>
-            <a:ext cx="11360551" cy="7609426"/>
+            <a:off x="9191565" y="4012320"/>
+            <a:ext cx="10507792" cy="7038238"/>
           </a:xfrm>
           <a:prstGeom prst="rect">
             <a:avLst/>
@@ -7573,7 +5205,551 @@
 </p:sld>
 </file>
 
-<file path=ppt/slides/slide9.xml><?xml version="1.0" encoding="utf-8"?>
+<file path=ppt/slides/slide5.xml><?xml version="1.0" encoding="utf-8"?>
+<p:sld xmlns:a="http://schemas.openxmlformats.org/drawingml/2006/main" xmlns:r="http://schemas.openxmlformats.org/officeDocument/2006/relationships" xmlns:p="http://schemas.openxmlformats.org/presentationml/2006/main">
+  <p:cSld>
+    <p:spTree>
+      <p:nvGrpSpPr>
+        <p:cNvPr id="1" name="Shape 63">
+          <a:extLst>
+            <a:ext uri="{FF2B5EF4-FFF2-40B4-BE49-F238E27FC236}">
+              <a16:creationId xmlns:a16="http://schemas.microsoft.com/office/drawing/2014/main" id="{1720E150-5069-3AF3-7A94-1296C6740EDD}"/>
+            </a:ext>
+          </a:extLst>
+        </p:cNvPr>
+        <p:cNvGrpSpPr/>
+        <p:nvPr/>
+      </p:nvGrpSpPr>
+      <p:grpSpPr>
+        <a:xfrm>
+          <a:off x="0" y="0"/>
+          <a:ext cx="0" cy="0"/>
+          <a:chOff x="0" y="0"/>
+          <a:chExt cx="0" cy="0"/>
+        </a:xfrm>
+      </p:grpSpPr>
+      <p:pic>
+        <p:nvPicPr>
+          <p:cNvPr id="2" name="Picture 2">
+            <a:extLst>
+              <a:ext uri="{FF2B5EF4-FFF2-40B4-BE49-F238E27FC236}">
+                <a16:creationId xmlns:a16="http://schemas.microsoft.com/office/drawing/2014/main" id="{33630766-3A7B-8DB4-709E-CAFC3419AEE1}"/>
+              </a:ext>
+            </a:extLst>
+          </p:cNvPr>
+          <p:cNvPicPr>
+            <a:picLocks noChangeAspect="1" noChangeArrowheads="1"/>
+          </p:cNvPicPr>
+          <p:nvPr/>
+        </p:nvPicPr>
+        <p:blipFill>
+          <a:blip r:embed="rId3">
+            <a:extLst>
+              <a:ext uri="{28A0092B-C50C-407E-A947-70E740481C1C}">
+                <a14:useLocalDpi xmlns:a14="http://schemas.microsoft.com/office/drawing/2010/main" val="0"/>
+              </a:ext>
+            </a:extLst>
+          </a:blip>
+          <a:srcRect/>
+          <a:stretch>
+            <a:fillRect/>
+          </a:stretch>
+        </p:blipFill>
+        <p:spPr bwMode="auto">
+          <a:xfrm>
+            <a:off x="18386747" y="0"/>
+            <a:ext cx="2345138" cy="1563425"/>
+          </a:xfrm>
+          <a:prstGeom prst="rect">
+            <a:avLst/>
+          </a:prstGeom>
+          <a:noFill/>
+          <a:extLst>
+            <a:ext uri="{909E8E84-426E-40DD-AFC4-6F175D3DCCD1}">
+              <a14:hiddenFill xmlns:a14="http://schemas.microsoft.com/office/drawing/2010/main">
+                <a:solidFill>
+                  <a:srgbClr val="FFFFFF"/>
+                </a:solidFill>
+              </a14:hiddenFill>
+            </a:ext>
+          </a:extLst>
+        </p:spPr>
+      </p:pic>
+      <p:pic>
+        <p:nvPicPr>
+          <p:cNvPr id="64" name="Google Shape;64;g3ca31053399_0_56" descr=" ">
+            <a:extLst>
+              <a:ext uri="{FF2B5EF4-FFF2-40B4-BE49-F238E27FC236}">
+                <a16:creationId xmlns:a16="http://schemas.microsoft.com/office/drawing/2014/main" id="{F21923BA-78BC-7899-7A48-B81271796271}"/>
+              </a:ext>
+            </a:extLst>
+          </p:cNvPr>
+          <p:cNvPicPr preferRelativeResize="0"/>
+          <p:nvPr/>
+        </p:nvPicPr>
+        <p:blipFill rotWithShape="1">
+          <a:blip r:embed="rId4">
+            <a:alphaModFix/>
+          </a:blip>
+          <a:srcRect/>
+          <a:stretch/>
+        </p:blipFill>
+        <p:spPr>
+          <a:xfrm>
+            <a:off x="12498685" y="9332149"/>
+            <a:ext cx="6324900" cy="5220774"/>
+          </a:xfrm>
+          <a:prstGeom prst="rect">
+            <a:avLst/>
+          </a:prstGeom>
+          <a:noFill/>
+          <a:ln>
+            <a:noFill/>
+          </a:ln>
+        </p:spPr>
+      </p:pic>
+      <p:sp>
+        <p:nvSpPr>
+          <p:cNvPr id="66" name="Google Shape;66;g3ca31053399_0_56">
+            <a:extLst>
+              <a:ext uri="{FF2B5EF4-FFF2-40B4-BE49-F238E27FC236}">
+                <a16:creationId xmlns:a16="http://schemas.microsoft.com/office/drawing/2014/main" id="{D9ABA9FF-1330-1A6E-C194-3754F432D7AB}"/>
+              </a:ext>
+            </a:extLst>
+          </p:cNvPr>
+          <p:cNvSpPr/>
+          <p:nvPr/>
+        </p:nvSpPr>
+        <p:spPr>
+          <a:xfrm>
+            <a:off x="488" y="1470024"/>
+            <a:ext cx="21387900" cy="25500"/>
+          </a:xfrm>
+          <a:prstGeom prst="rect">
+            <a:avLst/>
+          </a:prstGeom>
+          <a:solidFill>
+            <a:srgbClr val="ED3237"/>
+          </a:solidFill>
+          <a:ln>
+            <a:noFill/>
+          </a:ln>
+        </p:spPr>
+        <p:txBody>
+          <a:bodyPr spcFirstLastPara="1" wrap="square" lIns="91425" tIns="91425" rIns="91425" bIns="91425" anchor="ctr" anchorCtr="0">
+            <a:noAutofit/>
+          </a:bodyPr>
+          <a:lstStyle/>
+          <a:p>
+            <a:pPr marL="0" lvl="0" indent="0" algn="l" rtl="0">
+              <a:spcBef>
+                <a:spcPts val="0"/>
+              </a:spcBef>
+              <a:spcAft>
+                <a:spcPts val="0"/>
+              </a:spcAft>
+              <a:buNone/>
+            </a:pPr>
+            <a:endParaRPr/>
+          </a:p>
+        </p:txBody>
+      </p:sp>
+      <p:sp>
+        <p:nvSpPr>
+          <p:cNvPr id="67" name="Google Shape;67;g3ca31053399_0_56">
+            <a:extLst>
+              <a:ext uri="{FF2B5EF4-FFF2-40B4-BE49-F238E27FC236}">
+                <a16:creationId xmlns:a16="http://schemas.microsoft.com/office/drawing/2014/main" id="{A50DC1F0-0CBA-3C3C-5CBF-B1252F5BB452}"/>
+              </a:ext>
+            </a:extLst>
+          </p:cNvPr>
+          <p:cNvSpPr/>
+          <p:nvPr/>
+        </p:nvSpPr>
+        <p:spPr>
+          <a:xfrm>
+            <a:off x="0" y="15115032"/>
+            <a:ext cx="21387900" cy="152400"/>
+          </a:xfrm>
+          <a:prstGeom prst="rect">
+            <a:avLst/>
+          </a:prstGeom>
+          <a:solidFill>
+            <a:srgbClr val="413E3C"/>
+          </a:solidFill>
+          <a:ln>
+            <a:noFill/>
+          </a:ln>
+        </p:spPr>
+        <p:txBody>
+          <a:bodyPr spcFirstLastPara="1" wrap="square" lIns="91425" tIns="91425" rIns="91425" bIns="91425" anchor="ctr" anchorCtr="0">
+            <a:noAutofit/>
+          </a:bodyPr>
+          <a:lstStyle/>
+          <a:p>
+            <a:pPr marL="0" lvl="0" indent="0" algn="l" rtl="0">
+              <a:spcBef>
+                <a:spcPts val="0"/>
+              </a:spcBef>
+              <a:spcAft>
+                <a:spcPts val="0"/>
+              </a:spcAft>
+              <a:buNone/>
+            </a:pPr>
+            <a:endParaRPr/>
+          </a:p>
+        </p:txBody>
+      </p:sp>
+      <p:pic>
+        <p:nvPicPr>
+          <p:cNvPr id="68" name="Google Shape;68;g3ca31053399_0_56" descr=" ">
+            <a:extLst>
+              <a:ext uri="{FF2B5EF4-FFF2-40B4-BE49-F238E27FC236}">
+                <a16:creationId xmlns:a16="http://schemas.microsoft.com/office/drawing/2014/main" id="{B399EDCD-A3F9-77E8-BD2F-F8C1DCB6D467}"/>
+              </a:ext>
+            </a:extLst>
+          </p:cNvPr>
+          <p:cNvPicPr preferRelativeResize="0"/>
+          <p:nvPr/>
+        </p:nvPicPr>
+        <p:blipFill rotWithShape="1">
+          <a:blip r:embed="rId5">
+            <a:alphaModFix/>
+          </a:blip>
+          <a:srcRect/>
+          <a:stretch/>
+        </p:blipFill>
+        <p:spPr>
+          <a:xfrm>
+            <a:off x="17441655" y="192932"/>
+            <a:ext cx="1321886" cy="788994"/>
+          </a:xfrm>
+          <a:prstGeom prst="rect">
+            <a:avLst/>
+          </a:prstGeom>
+          <a:noFill/>
+          <a:ln>
+            <a:noFill/>
+          </a:ln>
+        </p:spPr>
+      </p:pic>
+      <p:pic>
+        <p:nvPicPr>
+          <p:cNvPr id="69" name="Google Shape;69;g3ca31053399_0_56" descr=" ">
+            <a:extLst>
+              <a:ext uri="{FF2B5EF4-FFF2-40B4-BE49-F238E27FC236}">
+                <a16:creationId xmlns:a16="http://schemas.microsoft.com/office/drawing/2014/main" id="{D96A94D9-D35B-A5FD-E666-0FAC2C9EBB57}"/>
+              </a:ext>
+            </a:extLst>
+          </p:cNvPr>
+          <p:cNvPicPr preferRelativeResize="0"/>
+          <p:nvPr/>
+        </p:nvPicPr>
+        <p:blipFill rotWithShape="1">
+          <a:blip r:embed="rId6">
+            <a:alphaModFix/>
+          </a:blip>
+          <a:srcRect/>
+          <a:stretch/>
+        </p:blipFill>
+        <p:spPr>
+          <a:xfrm>
+            <a:off x="774737" y="9629829"/>
+            <a:ext cx="5042140" cy="5156893"/>
+          </a:xfrm>
+          <a:prstGeom prst="rect">
+            <a:avLst/>
+          </a:prstGeom>
+          <a:noFill/>
+          <a:ln>
+            <a:noFill/>
+          </a:ln>
+        </p:spPr>
+      </p:pic>
+      <p:sp>
+        <p:nvSpPr>
+          <p:cNvPr id="70" name="Google Shape;70;g3ca31053399_0_56">
+            <a:extLst>
+              <a:ext uri="{FF2B5EF4-FFF2-40B4-BE49-F238E27FC236}">
+                <a16:creationId xmlns:a16="http://schemas.microsoft.com/office/drawing/2014/main" id="{C751ED37-257E-2F12-33E5-0E02A792EA49}"/>
+              </a:ext>
+            </a:extLst>
+          </p:cNvPr>
+          <p:cNvSpPr txBox="1"/>
+          <p:nvPr/>
+        </p:nvSpPr>
+        <p:spPr>
+          <a:xfrm>
+            <a:off x="2789063" y="201136"/>
+            <a:ext cx="14822860" cy="789000"/>
+          </a:xfrm>
+          <a:prstGeom prst="rect">
+            <a:avLst/>
+          </a:prstGeom>
+          <a:noFill/>
+          <a:ln>
+            <a:noFill/>
+          </a:ln>
+        </p:spPr>
+        <p:txBody>
+          <a:bodyPr spcFirstLastPara="1" wrap="square" lIns="91425" tIns="91425" rIns="91425" bIns="91425" anchor="t" anchorCtr="0">
+            <a:noAutofit/>
+          </a:bodyPr>
+          <a:lstStyle/>
+          <a:p>
+            <a:pPr algn="just"/>
+            <a:r>
+              <a:rPr lang="en-US" sz="3800" b="1" dirty="0">
+                <a:solidFill>
+                  <a:srgbClr val="FF0000"/>
+                </a:solidFill>
+              </a:rPr>
+              <a:t>Random Forest Cont.</a:t>
+            </a:r>
+          </a:p>
+          <a:p>
+            <a:pPr algn="just"/>
+            <a:endParaRPr lang="en-US" sz="3600" b="1" dirty="0">
+              <a:solidFill>
+                <a:srgbClr val="FF0000"/>
+              </a:solidFill>
+            </a:endParaRPr>
+          </a:p>
+          <a:p>
+            <a:pPr marL="0" lvl="0" indent="0" algn="l" rtl="0">
+              <a:spcBef>
+                <a:spcPts val="0"/>
+              </a:spcBef>
+              <a:spcAft>
+                <a:spcPts val="0"/>
+              </a:spcAft>
+              <a:buNone/>
+            </a:pPr>
+            <a:endParaRPr b="1" dirty="0"/>
+          </a:p>
+        </p:txBody>
+      </p:sp>
+      <p:sp>
+        <p:nvSpPr>
+          <p:cNvPr id="7" name="TextBox 6">
+            <a:extLst>
+              <a:ext uri="{FF2B5EF4-FFF2-40B4-BE49-F238E27FC236}">
+                <a16:creationId xmlns:a16="http://schemas.microsoft.com/office/drawing/2014/main" id="{2F66BDBE-2C46-DDD0-5253-A15F1B67AE65}"/>
+              </a:ext>
+            </a:extLst>
+          </p:cNvPr>
+          <p:cNvSpPr txBox="1"/>
+          <p:nvPr/>
+        </p:nvSpPr>
+        <p:spPr>
+          <a:xfrm>
+            <a:off x="1989668" y="10501660"/>
+            <a:ext cx="16421649" cy="2554545"/>
+          </a:xfrm>
+          <a:prstGeom prst="rect">
+            <a:avLst/>
+          </a:prstGeom>
+          <a:noFill/>
+        </p:spPr>
+        <p:txBody>
+          <a:bodyPr wrap="square" rtlCol="0">
+            <a:spAutoFit/>
+          </a:bodyPr>
+          <a:lstStyle/>
+          <a:p>
+            <a:r>
+              <a:rPr lang="en-US" sz="3200" b="1" dirty="0">
+                <a:solidFill>
+                  <a:srgbClr val="FF0000"/>
+                </a:solidFill>
+                <a:latin typeface="Times New Roman" panose="02020603050405020304" pitchFamily="18" charset="0"/>
+                <a:cs typeface="Times New Roman" panose="02020603050405020304" pitchFamily="18" charset="0"/>
+              </a:rPr>
+              <a:t>Random Forest Metrics:</a:t>
+            </a:r>
+          </a:p>
+          <a:p>
+            <a:pPr marL="457200" indent="-457200">
+              <a:buFont typeface="Arial" panose="020B0604020202020204" pitchFamily="34" charset="0"/>
+              <a:buChar char="•"/>
+            </a:pPr>
+            <a:r>
+              <a:rPr lang="en-US" sz="3200" b="1" dirty="0">
+                <a:latin typeface="Times New Roman" panose="02020603050405020304" pitchFamily="18" charset="0"/>
+                <a:cs typeface="Times New Roman" panose="02020603050405020304" pitchFamily="18" charset="0"/>
+              </a:rPr>
+              <a:t>Plot 1: </a:t>
+            </a:r>
+            <a:r>
+              <a:rPr lang="en-US" sz="3200" dirty="0">
+                <a:latin typeface="Times New Roman" panose="02020603050405020304" pitchFamily="18" charset="0"/>
+                <a:cs typeface="Times New Roman" panose="02020603050405020304" pitchFamily="18" charset="0"/>
+              </a:rPr>
+              <a:t>Interest rate has an upward slope; it has real predictive power even after controlling the other variables</a:t>
+            </a:r>
+            <a:endParaRPr lang="en-US" sz="3200" b="1" dirty="0">
+              <a:latin typeface="Times New Roman" panose="02020603050405020304" pitchFamily="18" charset="0"/>
+              <a:cs typeface="Times New Roman" panose="02020603050405020304" pitchFamily="18" charset="0"/>
+            </a:endParaRPr>
+          </a:p>
+          <a:p>
+            <a:pPr marL="457200" indent="-457200">
+              <a:buFont typeface="Arial" panose="020B0604020202020204" pitchFamily="34" charset="0"/>
+              <a:buChar char="•"/>
+            </a:pPr>
+            <a:r>
+              <a:rPr lang="en-US" sz="3200" b="1" dirty="0">
+                <a:latin typeface="Times New Roman" panose="02020603050405020304" pitchFamily="18" charset="0"/>
+                <a:cs typeface="Times New Roman" panose="02020603050405020304" pitchFamily="18" charset="0"/>
+              </a:rPr>
+              <a:t>Plot 2: </a:t>
+            </a:r>
+            <a:r>
+              <a:rPr lang="en-US" sz="3200" dirty="0">
+                <a:latin typeface="Times New Roman" panose="02020603050405020304" pitchFamily="18" charset="0"/>
+                <a:cs typeface="Times New Roman" panose="02020603050405020304" pitchFamily="18" charset="0"/>
+              </a:rPr>
+              <a:t>The gradient for each loan grade gets flatter. Loan grade is absorbing interest rate’s influence on the model.</a:t>
+            </a:r>
+            <a:endParaRPr lang="en-US" sz="3200" b="1" dirty="0">
+              <a:latin typeface="Times New Roman" panose="02020603050405020304" pitchFamily="18" charset="0"/>
+              <a:cs typeface="Times New Roman" panose="02020603050405020304" pitchFamily="18" charset="0"/>
+            </a:endParaRPr>
+          </a:p>
+        </p:txBody>
+      </p:sp>
+      <p:sp>
+        <p:nvSpPr>
+          <p:cNvPr id="16" name="Text 2">
+            <a:extLst>
+              <a:ext uri="{FF2B5EF4-FFF2-40B4-BE49-F238E27FC236}">
+                <a16:creationId xmlns:a16="http://schemas.microsoft.com/office/drawing/2014/main" id="{B9474347-8882-0F8F-B3AA-C279E71011C1}"/>
+              </a:ext>
+            </a:extLst>
+          </p:cNvPr>
+          <p:cNvSpPr/>
+          <p:nvPr/>
+        </p:nvSpPr>
+        <p:spPr>
+          <a:xfrm>
+            <a:off x="253263" y="536473"/>
+            <a:ext cx="2706068" cy="584279"/>
+          </a:xfrm>
+          <a:prstGeom prst="rect">
+            <a:avLst/>
+          </a:prstGeom>
+          <a:noFill/>
+          <a:ln/>
+        </p:spPr>
+        <p:txBody>
+          <a:bodyPr wrap="square" lIns="0" tIns="0" rIns="0" bIns="0" rtlCol="0" anchor="ctr"/>
+          <a:lstStyle/>
+          <a:p>
+            <a:pPr marL="0" indent="0" algn="l">
+              <a:buNone/>
+            </a:pPr>
+            <a:r>
+              <a:rPr lang="en-US" sz="4000" b="1" dirty="0">
+                <a:solidFill>
+                  <a:srgbClr val="0070C0"/>
+                </a:solidFill>
+                <a:latin typeface="Arial Black" panose="020B0A04020102020204" pitchFamily="34" charset="0"/>
+              </a:rPr>
+              <a:t>SMQ-3</a:t>
+            </a:r>
+            <a:endParaRPr lang="uz-Cyrl-UZ" sz="4000" b="1" dirty="0">
+              <a:solidFill>
+                <a:srgbClr val="0070C0"/>
+              </a:solidFill>
+              <a:latin typeface="Arial Black" panose="020B0A04020102020204" pitchFamily="34" charset="0"/>
+            </a:endParaRPr>
+          </a:p>
+          <a:p>
+            <a:pPr marL="0" indent="0" algn="l">
+              <a:buNone/>
+            </a:pPr>
+            <a:endParaRPr lang="en-US" sz="3000" b="1" dirty="0">
+              <a:solidFill>
+                <a:srgbClr val="0070C0"/>
+              </a:solidFill>
+            </a:endParaRPr>
+          </a:p>
+        </p:txBody>
+      </p:sp>
+      <p:pic>
+        <p:nvPicPr>
+          <p:cNvPr id="5" name="Picture 4">
+            <a:extLst>
+              <a:ext uri="{FF2B5EF4-FFF2-40B4-BE49-F238E27FC236}">
+                <a16:creationId xmlns:a16="http://schemas.microsoft.com/office/drawing/2014/main" id="{ABAD1499-A29D-7C6D-36AF-35438599CF61}"/>
+              </a:ext>
+            </a:extLst>
+          </p:cNvPr>
+          <p:cNvPicPr>
+            <a:picLocks noChangeAspect="1"/>
+          </p:cNvPicPr>
+          <p:nvPr/>
+        </p:nvPicPr>
+        <p:blipFill>
+          <a:blip r:embed="rId7"/>
+          <a:stretch>
+            <a:fillRect/>
+          </a:stretch>
+        </p:blipFill>
+        <p:spPr>
+          <a:xfrm>
+            <a:off x="526005" y="2895129"/>
+            <a:ext cx="10167945" cy="6831364"/>
+          </a:xfrm>
+          <a:prstGeom prst="rect">
+            <a:avLst/>
+          </a:prstGeom>
+        </p:spPr>
+      </p:pic>
+      <p:pic>
+        <p:nvPicPr>
+          <p:cNvPr id="4" name="Picture 3">
+            <a:extLst>
+              <a:ext uri="{FF2B5EF4-FFF2-40B4-BE49-F238E27FC236}">
+                <a16:creationId xmlns:a16="http://schemas.microsoft.com/office/drawing/2014/main" id="{43BBFB87-162E-ADBF-2C0F-05CE99A1B841}"/>
+              </a:ext>
+            </a:extLst>
+          </p:cNvPr>
+          <p:cNvPicPr>
+            <a:picLocks noChangeAspect="1"/>
+          </p:cNvPicPr>
+          <p:nvPr/>
+        </p:nvPicPr>
+        <p:blipFill>
+          <a:blip r:embed="rId8"/>
+          <a:stretch>
+            <a:fillRect/>
+          </a:stretch>
+        </p:blipFill>
+        <p:spPr>
+          <a:xfrm>
+            <a:off x="10563940" y="3033449"/>
+            <a:ext cx="10167945" cy="6860127"/>
+          </a:xfrm>
+          <a:prstGeom prst="rect">
+            <a:avLst/>
+          </a:prstGeom>
+        </p:spPr>
+      </p:pic>
+    </p:spTree>
+    <p:extLst>
+      <p:ext uri="{BB962C8B-B14F-4D97-AF65-F5344CB8AC3E}">
+        <p14:creationId xmlns:p14="http://schemas.microsoft.com/office/powerpoint/2010/main" val="2691502752"/>
+      </p:ext>
+    </p:extLst>
+  </p:cSld>
+  <p:clrMapOvr>
+    <a:masterClrMapping/>
+  </p:clrMapOvr>
+</p:sld>
+</file>
+
+<file path=ppt/slides/slide6.xml><?xml version="1.0" encoding="utf-8"?>
 <p:sld xmlns:a="http://schemas.openxmlformats.org/drawingml/2006/main" xmlns:r="http://schemas.openxmlformats.org/officeDocument/2006/relationships" xmlns:p="http://schemas.openxmlformats.org/presentationml/2006/main">
   <p:cSld>
     <p:spTree>
@@ -7998,8 +6174,8 @@
         </p:nvSpPr>
         <p:spPr>
           <a:xfrm>
-            <a:off x="12111378" y="2839974"/>
-            <a:ext cx="7268396" cy="9941183"/>
+            <a:off x="11652990" y="5156064"/>
+            <a:ext cx="9377377" cy="4524315"/>
           </a:xfrm>
           <a:prstGeom prst="rect">
             <a:avLst/>
@@ -8040,7 +6216,7 @@
                 <a:latin typeface="Times New Roman" panose="02020603050405020304" pitchFamily="18" charset="0"/>
                 <a:cs typeface="Times New Roman" panose="02020603050405020304" pitchFamily="18" charset="0"/>
               </a:rPr>
-              <a:t> A 1% increase in interest rate multiplies the odds of default by 1.0881, holding all else constant. </a:t>
+              <a:t> </a:t>
             </a:r>
           </a:p>
           <a:p>
@@ -8053,7 +6229,7 @@
                 <a:latin typeface="Times New Roman" panose="02020603050405020304" pitchFamily="18" charset="0"/>
                 <a:cs typeface="Times New Roman" panose="02020603050405020304" pitchFamily="18" charset="0"/>
               </a:rPr>
-              <a:t>Some other important variable include the following:</a:t>
+              <a:t>Other important variables:</a:t>
             </a:r>
             <a:r>
               <a:rPr lang="en-US" sz="3200" dirty="0">
@@ -8126,55 +6302,21 @@
                 <a:latin typeface="Times New Roman" panose="02020603050405020304" pitchFamily="18" charset="0"/>
                 <a:cs typeface="Times New Roman" panose="02020603050405020304" pitchFamily="18" charset="0"/>
               </a:rPr>
-              <a:t>Sensitivity: </a:t>
+              <a:t>Model Bias: </a:t>
             </a:r>
             <a:r>
               <a:rPr lang="en-US" sz="3200" dirty="0">
                 <a:latin typeface="Times New Roman" panose="02020603050405020304" pitchFamily="18" charset="0"/>
                 <a:cs typeface="Times New Roman" panose="02020603050405020304" pitchFamily="18" charset="0"/>
               </a:rPr>
-              <a:t>This value rose which each model but not to an unreliable level</a:t>
+              <a:t>The data is imbalanced. 78% of the data are non-default borrowers.</a:t>
             </a:r>
           </a:p>
           <a:p>
-            <a:pPr marL="457200" indent="-457200">
-              <a:buFont typeface="Arial" panose="020B0604020202020204" pitchFamily="34" charset="0"/>
-              <a:buChar char="•"/>
-            </a:pPr>
-            <a:r>
-              <a:rPr lang="en-US" sz="3200" b="1" dirty="0">
-                <a:latin typeface="Times New Roman" panose="02020603050405020304" pitchFamily="18" charset="0"/>
-                <a:cs typeface="Times New Roman" panose="02020603050405020304" pitchFamily="18" charset="0"/>
-              </a:rPr>
-              <a:t>Specificity =</a:t>
-            </a:r>
-            <a:r>
-              <a:rPr lang="en-US" sz="3200" dirty="0">
-                <a:latin typeface="Times New Roman" panose="02020603050405020304" pitchFamily="18" charset="0"/>
-                <a:cs typeface="Times New Roman" panose="02020603050405020304" pitchFamily="18" charset="0"/>
-              </a:rPr>
-              <a:t> 99.60%. This value rose each time. The random forest value is almost at 100% since the data is imbalanced. 78% of the data are non-default borrowers.</a:t>
-            </a:r>
-          </a:p>
-          <a:p>
-            <a:pPr marL="457200" indent="-457200">
-              <a:buFont typeface="Arial" panose="020B0604020202020204" pitchFamily="34" charset="0"/>
-              <a:buChar char="•"/>
-            </a:pPr>
-            <a:r>
-              <a:rPr lang="en-US" sz="3200" b="1" dirty="0">
-                <a:latin typeface="Times New Roman" panose="02020603050405020304" pitchFamily="18" charset="0"/>
-                <a:cs typeface="Times New Roman" panose="02020603050405020304" pitchFamily="18" charset="0"/>
-              </a:rPr>
-              <a:t>AUC</a:t>
-            </a:r>
-            <a:r>
-              <a:rPr lang="en-US" sz="3200" dirty="0">
-                <a:latin typeface="Times New Roman" panose="02020603050405020304" pitchFamily="18" charset="0"/>
-                <a:cs typeface="Times New Roman" panose="02020603050405020304" pitchFamily="18" charset="0"/>
-              </a:rPr>
-              <a:t> = 93.1%. This value improved with each model. </a:t>
-            </a:r>
+            <a:endParaRPr lang="en-US" sz="3200" dirty="0">
+              <a:latin typeface="Times New Roman" panose="02020603050405020304" pitchFamily="18" charset="0"/>
+              <a:cs typeface="Times New Roman" panose="02020603050405020304" pitchFamily="18" charset="0"/>
+            </a:endParaRPr>
           </a:p>
         </p:txBody>
       </p:sp>
@@ -8240,6 +6382,429 @@
     <p:extLst>
       <p:ext uri="{BB962C8B-B14F-4D97-AF65-F5344CB8AC3E}">
         <p14:creationId xmlns:p14="http://schemas.microsoft.com/office/powerpoint/2010/main" val="727361635"/>
+      </p:ext>
+    </p:extLst>
+  </p:cSld>
+  <p:clrMapOvr>
+    <a:masterClrMapping/>
+  </p:clrMapOvr>
+</p:sld>
+</file>
+
+<file path=ppt/slides/slide7.xml><?xml version="1.0" encoding="utf-8"?>
+<p:sld xmlns:a="http://schemas.openxmlformats.org/drawingml/2006/main" xmlns:r="http://schemas.openxmlformats.org/officeDocument/2006/relationships" xmlns:p="http://schemas.openxmlformats.org/presentationml/2006/main">
+  <p:cSld>
+    <p:spTree>
+      <p:nvGrpSpPr>
+        <p:cNvPr id="1" name="Shape 50">
+          <a:extLst>
+            <a:ext uri="{FF2B5EF4-FFF2-40B4-BE49-F238E27FC236}">
+              <a16:creationId xmlns:a16="http://schemas.microsoft.com/office/drawing/2014/main" id="{AFEE5EF2-73B2-8F54-271D-5C83EB9BF53F}"/>
+            </a:ext>
+          </a:extLst>
+        </p:cNvPr>
+        <p:cNvGrpSpPr/>
+        <p:nvPr/>
+      </p:nvGrpSpPr>
+      <p:grpSpPr>
+        <a:xfrm>
+          <a:off x="0" y="0"/>
+          <a:ext cx="0" cy="0"/>
+          <a:chOff x="0" y="0"/>
+          <a:chExt cx="0" cy="0"/>
+        </a:xfrm>
+      </p:grpSpPr>
+      <p:pic>
+        <p:nvPicPr>
+          <p:cNvPr id="2" name="Picture 2">
+            <a:extLst>
+              <a:ext uri="{FF2B5EF4-FFF2-40B4-BE49-F238E27FC236}">
+                <a16:creationId xmlns:a16="http://schemas.microsoft.com/office/drawing/2014/main" id="{6AF47A96-CBAD-ECEB-744F-F690C21619C1}"/>
+              </a:ext>
+            </a:extLst>
+          </p:cNvPr>
+          <p:cNvPicPr>
+            <a:picLocks noChangeAspect="1" noChangeArrowheads="1"/>
+          </p:cNvPicPr>
+          <p:nvPr/>
+        </p:nvPicPr>
+        <p:blipFill>
+          <a:blip r:embed="rId3">
+            <a:extLst>
+              <a:ext uri="{28A0092B-C50C-407E-A947-70E740481C1C}">
+                <a14:useLocalDpi xmlns:a14="http://schemas.microsoft.com/office/drawing/2010/main" val="0"/>
+              </a:ext>
+            </a:extLst>
+          </a:blip>
+          <a:srcRect/>
+          <a:stretch>
+            <a:fillRect/>
+          </a:stretch>
+        </p:blipFill>
+        <p:spPr bwMode="auto">
+          <a:xfrm>
+            <a:off x="18386747" y="0"/>
+            <a:ext cx="2345138" cy="1563425"/>
+          </a:xfrm>
+          <a:prstGeom prst="rect">
+            <a:avLst/>
+          </a:prstGeom>
+          <a:noFill/>
+          <a:extLst>
+            <a:ext uri="{909E8E84-426E-40DD-AFC4-6F175D3DCCD1}">
+              <a14:hiddenFill xmlns:a14="http://schemas.microsoft.com/office/drawing/2010/main">
+                <a:solidFill>
+                  <a:srgbClr val="FFFFFF"/>
+                </a:solidFill>
+              </a14:hiddenFill>
+            </a:ext>
+          </a:extLst>
+        </p:spPr>
+      </p:pic>
+      <p:pic>
+        <p:nvPicPr>
+          <p:cNvPr id="51" name="Google Shape;51;g3ca31053399_0_44" descr=" ">
+            <a:extLst>
+              <a:ext uri="{FF2B5EF4-FFF2-40B4-BE49-F238E27FC236}">
+                <a16:creationId xmlns:a16="http://schemas.microsoft.com/office/drawing/2014/main" id="{2DCB16BF-8B18-A175-6D93-8FC4C7D13854}"/>
+              </a:ext>
+            </a:extLst>
+          </p:cNvPr>
+          <p:cNvPicPr preferRelativeResize="0"/>
+          <p:nvPr/>
+        </p:nvPicPr>
+        <p:blipFill rotWithShape="1">
+          <a:blip r:embed="rId4">
+            <a:alphaModFix/>
+          </a:blip>
+          <a:srcRect/>
+          <a:stretch/>
+        </p:blipFill>
+        <p:spPr>
+          <a:xfrm>
+            <a:off x="12498685" y="9332149"/>
+            <a:ext cx="6324900" cy="5220774"/>
+          </a:xfrm>
+          <a:prstGeom prst="rect">
+            <a:avLst/>
+          </a:prstGeom>
+          <a:noFill/>
+          <a:ln>
+            <a:noFill/>
+          </a:ln>
+        </p:spPr>
+      </p:pic>
+      <p:pic>
+        <p:nvPicPr>
+          <p:cNvPr id="52" name="Google Shape;52;g3ca31053399_0_44" descr=" ">
+            <a:extLst>
+              <a:ext uri="{FF2B5EF4-FFF2-40B4-BE49-F238E27FC236}">
+                <a16:creationId xmlns:a16="http://schemas.microsoft.com/office/drawing/2014/main" id="{4712A96C-431D-BDDF-0C31-A10963D979A5}"/>
+              </a:ext>
+            </a:extLst>
+          </p:cNvPr>
+          <p:cNvPicPr preferRelativeResize="0"/>
+          <p:nvPr/>
+        </p:nvPicPr>
+        <p:blipFill rotWithShape="1">
+          <a:blip r:embed="rId5">
+            <a:alphaModFix/>
+          </a:blip>
+          <a:srcRect/>
+          <a:stretch/>
+        </p:blipFill>
+        <p:spPr>
+          <a:xfrm>
+            <a:off x="14796618" y="1042904"/>
+            <a:ext cx="6591197" cy="7727137"/>
+          </a:xfrm>
+          <a:prstGeom prst="rect">
+            <a:avLst/>
+          </a:prstGeom>
+          <a:noFill/>
+          <a:ln>
+            <a:noFill/>
+          </a:ln>
+        </p:spPr>
+      </p:pic>
+      <p:sp>
+        <p:nvSpPr>
+          <p:cNvPr id="53" name="Google Shape;53;g3ca31053399_0_44">
+            <a:extLst>
+              <a:ext uri="{FF2B5EF4-FFF2-40B4-BE49-F238E27FC236}">
+                <a16:creationId xmlns:a16="http://schemas.microsoft.com/office/drawing/2014/main" id="{0C7F5EA4-B751-AAA0-B661-7908DD695F02}"/>
+              </a:ext>
+            </a:extLst>
+          </p:cNvPr>
+          <p:cNvSpPr/>
+          <p:nvPr/>
+        </p:nvSpPr>
+        <p:spPr>
+          <a:xfrm>
+            <a:off x="0" y="1193961"/>
+            <a:ext cx="21387900" cy="25500"/>
+          </a:xfrm>
+          <a:prstGeom prst="rect">
+            <a:avLst/>
+          </a:prstGeom>
+          <a:solidFill>
+            <a:srgbClr val="ED3237"/>
+          </a:solidFill>
+          <a:ln>
+            <a:noFill/>
+          </a:ln>
+        </p:spPr>
+        <p:txBody>
+          <a:bodyPr spcFirstLastPara="1" wrap="square" lIns="91425" tIns="91425" rIns="91425" bIns="91425" anchor="ctr" anchorCtr="0">
+            <a:noAutofit/>
+          </a:bodyPr>
+          <a:lstStyle/>
+          <a:p>
+            <a:pPr marL="0" lvl="0" indent="0" algn="l" rtl="0">
+              <a:spcBef>
+                <a:spcPts val="0"/>
+              </a:spcBef>
+              <a:spcAft>
+                <a:spcPts val="0"/>
+              </a:spcAft>
+              <a:buNone/>
+            </a:pPr>
+            <a:endParaRPr/>
+          </a:p>
+        </p:txBody>
+      </p:sp>
+      <p:sp>
+        <p:nvSpPr>
+          <p:cNvPr id="54" name="Google Shape;54;g3ca31053399_0_44">
+            <a:extLst>
+              <a:ext uri="{FF2B5EF4-FFF2-40B4-BE49-F238E27FC236}">
+                <a16:creationId xmlns:a16="http://schemas.microsoft.com/office/drawing/2014/main" id="{FDA1D188-94D9-88CC-91BB-CEA18773408A}"/>
+              </a:ext>
+            </a:extLst>
+          </p:cNvPr>
+          <p:cNvSpPr/>
+          <p:nvPr/>
+        </p:nvSpPr>
+        <p:spPr>
+          <a:xfrm>
+            <a:off x="0" y="15115032"/>
+            <a:ext cx="21387900" cy="152400"/>
+          </a:xfrm>
+          <a:prstGeom prst="rect">
+            <a:avLst/>
+          </a:prstGeom>
+          <a:solidFill>
+            <a:srgbClr val="413E3C"/>
+          </a:solidFill>
+          <a:ln>
+            <a:noFill/>
+          </a:ln>
+        </p:spPr>
+        <p:txBody>
+          <a:bodyPr spcFirstLastPara="1" wrap="square" lIns="91425" tIns="91425" rIns="91425" bIns="91425" anchor="ctr" anchorCtr="0">
+            <a:noAutofit/>
+          </a:bodyPr>
+          <a:lstStyle/>
+          <a:p>
+            <a:pPr marL="0" lvl="0" indent="0" algn="l" rtl="0">
+              <a:spcBef>
+                <a:spcPts val="0"/>
+              </a:spcBef>
+              <a:spcAft>
+                <a:spcPts val="0"/>
+              </a:spcAft>
+              <a:buNone/>
+            </a:pPr>
+            <a:endParaRPr/>
+          </a:p>
+        </p:txBody>
+      </p:sp>
+      <p:pic>
+        <p:nvPicPr>
+          <p:cNvPr id="55" name="Google Shape;55;g3ca31053399_0_44" descr=" ">
+            <a:extLst>
+              <a:ext uri="{FF2B5EF4-FFF2-40B4-BE49-F238E27FC236}">
+                <a16:creationId xmlns:a16="http://schemas.microsoft.com/office/drawing/2014/main" id="{0D11295A-6761-8D41-1963-CC2742C6FA92}"/>
+              </a:ext>
+            </a:extLst>
+          </p:cNvPr>
+          <p:cNvPicPr preferRelativeResize="0"/>
+          <p:nvPr/>
+        </p:nvPicPr>
+        <p:blipFill rotWithShape="1">
+          <a:blip r:embed="rId6">
+            <a:alphaModFix/>
+          </a:blip>
+          <a:srcRect/>
+          <a:stretch/>
+        </p:blipFill>
+        <p:spPr>
+          <a:xfrm>
+            <a:off x="17441655" y="192932"/>
+            <a:ext cx="1321886" cy="788994"/>
+          </a:xfrm>
+          <a:prstGeom prst="rect">
+            <a:avLst/>
+          </a:prstGeom>
+          <a:noFill/>
+          <a:ln>
+            <a:noFill/>
+          </a:ln>
+        </p:spPr>
+      </p:pic>
+      <p:pic>
+        <p:nvPicPr>
+          <p:cNvPr id="56" name="Google Shape;56;g3ca31053399_0_44" descr=" ">
+            <a:extLst>
+              <a:ext uri="{FF2B5EF4-FFF2-40B4-BE49-F238E27FC236}">
+                <a16:creationId xmlns:a16="http://schemas.microsoft.com/office/drawing/2014/main" id="{373FFCC9-E399-3A86-080A-2C1C39882BD4}"/>
+              </a:ext>
+            </a:extLst>
+          </p:cNvPr>
+          <p:cNvPicPr preferRelativeResize="0"/>
+          <p:nvPr/>
+        </p:nvPicPr>
+        <p:blipFill rotWithShape="1">
+          <a:blip r:embed="rId7">
+            <a:alphaModFix/>
+          </a:blip>
+          <a:srcRect/>
+          <a:stretch/>
+        </p:blipFill>
+        <p:spPr>
+          <a:xfrm>
+            <a:off x="774737" y="9629829"/>
+            <a:ext cx="5042140" cy="5156893"/>
+          </a:xfrm>
+          <a:prstGeom prst="rect">
+            <a:avLst/>
+          </a:prstGeom>
+          <a:noFill/>
+          <a:ln>
+            <a:noFill/>
+          </a:ln>
+        </p:spPr>
+      </p:pic>
+      <p:sp>
+        <p:nvSpPr>
+          <p:cNvPr id="57" name="Google Shape;57;g3ca31053399_0_44">
+            <a:extLst>
+              <a:ext uri="{FF2B5EF4-FFF2-40B4-BE49-F238E27FC236}">
+                <a16:creationId xmlns:a16="http://schemas.microsoft.com/office/drawing/2014/main" id="{357B6308-8515-72F6-7A86-5DF3A0142109}"/>
+              </a:ext>
+            </a:extLst>
+          </p:cNvPr>
+          <p:cNvSpPr txBox="1"/>
+          <p:nvPr/>
+        </p:nvSpPr>
+        <p:spPr>
+          <a:xfrm>
+            <a:off x="1387225" y="186350"/>
+            <a:ext cx="6901500" cy="789000"/>
+          </a:xfrm>
+          <a:prstGeom prst="rect">
+            <a:avLst/>
+          </a:prstGeom>
+          <a:noFill/>
+          <a:ln>
+            <a:noFill/>
+          </a:ln>
+        </p:spPr>
+        <p:txBody>
+          <a:bodyPr spcFirstLastPara="1" wrap="square" lIns="91425" tIns="91425" rIns="91425" bIns="91425" anchor="t" anchorCtr="0">
+            <a:noAutofit/>
+          </a:bodyPr>
+          <a:lstStyle/>
+          <a:p>
+            <a:pPr lvl="0"/>
+            <a:r>
+              <a:rPr lang="en-US" sz="3000" dirty="0">
+                <a:latin typeface="Times New Roman" panose="02020603050405020304" pitchFamily="18" charset="0"/>
+                <a:cs typeface="Times New Roman" panose="02020603050405020304" pitchFamily="18" charset="0"/>
+              </a:rPr>
+              <a:t>Appendix</a:t>
+            </a:r>
+          </a:p>
+        </p:txBody>
+      </p:sp>
+      <p:sp>
+        <p:nvSpPr>
+          <p:cNvPr id="58" name="Google Shape;58;g3ca31053399_0_44">
+            <a:extLst>
+              <a:ext uri="{FF2B5EF4-FFF2-40B4-BE49-F238E27FC236}">
+                <a16:creationId xmlns:a16="http://schemas.microsoft.com/office/drawing/2014/main" id="{E6BB464D-F7C9-7A12-5515-54DA14B3B8F5}"/>
+              </a:ext>
+            </a:extLst>
+          </p:cNvPr>
+          <p:cNvSpPr txBox="1"/>
+          <p:nvPr/>
+        </p:nvSpPr>
+        <p:spPr>
+          <a:xfrm>
+            <a:off x="1549350" y="2967364"/>
+            <a:ext cx="18289200" cy="10801200"/>
+          </a:xfrm>
+          <a:prstGeom prst="rect">
+            <a:avLst/>
+          </a:prstGeom>
+          <a:noFill/>
+          <a:ln>
+            <a:noFill/>
+          </a:ln>
+        </p:spPr>
+        <p:txBody>
+          <a:bodyPr spcFirstLastPara="1" wrap="square" lIns="91425" tIns="91425" rIns="91425" bIns="91425" anchor="t" anchorCtr="0">
+            <a:noAutofit/>
+          </a:bodyPr>
+          <a:lstStyle/>
+          <a:p>
+            <a:pPr marL="0" lvl="0" indent="0" algn="l" rtl="0">
+              <a:spcBef>
+                <a:spcPts val="0"/>
+              </a:spcBef>
+              <a:spcAft>
+                <a:spcPts val="0"/>
+              </a:spcAft>
+              <a:buNone/>
+            </a:pPr>
+            <a:endParaRPr/>
+          </a:p>
+        </p:txBody>
+      </p:sp>
+      <p:pic>
+        <p:nvPicPr>
+          <p:cNvPr id="4" name="Picture 3">
+            <a:extLst>
+              <a:ext uri="{FF2B5EF4-FFF2-40B4-BE49-F238E27FC236}">
+                <a16:creationId xmlns:a16="http://schemas.microsoft.com/office/drawing/2014/main" id="{ACCA89CC-2DA8-ABC6-A619-D5F4BC7CAC51}"/>
+              </a:ext>
+            </a:extLst>
+          </p:cNvPr>
+          <p:cNvPicPr>
+            <a:picLocks noChangeAspect="1"/>
+          </p:cNvPicPr>
+          <p:nvPr/>
+        </p:nvPicPr>
+        <p:blipFill>
+          <a:blip r:embed="rId8"/>
+          <a:stretch>
+            <a:fillRect/>
+          </a:stretch>
+        </p:blipFill>
+        <p:spPr>
+          <a:xfrm>
+            <a:off x="3164318" y="2565929"/>
+            <a:ext cx="14927898" cy="10391173"/>
+          </a:xfrm>
+          <a:prstGeom prst="rect">
+            <a:avLst/>
+          </a:prstGeom>
+        </p:spPr>
+      </p:pic>
+    </p:spTree>
+    <p:extLst>
+      <p:ext uri="{BB962C8B-B14F-4D97-AF65-F5344CB8AC3E}">
+        <p14:creationId xmlns:p14="http://schemas.microsoft.com/office/powerpoint/2010/main" val="4214831028"/>
       </p:ext>
     </p:extLst>
   </p:cSld>

--- a/Project 2_presentation_SMART #4.pptx
+++ b/Project 2_presentation_SMART #4.pptx
@@ -252,7 +252,7 @@
       <p15:sldGuideLst xmlns:p15="http://schemas.microsoft.com/office/powerpoint/2012/main"/>
     </p:ext>
     <p:ext uri="GoogleSlidesCustomDataVersion2">
-      <go:slidesCustomData xmlns="" xmlns:mc="http://schemas.openxmlformats.org/markup-compatibility/2006" xmlns:mv="urn:schemas-microsoft-com:mac:vml" xmlns:c="http://schemas.openxmlformats.org/drawingml/2006/chart" xmlns:dgm="http://schemas.openxmlformats.org/drawingml/2006/diagram" xmlns:o="urn:schemas-microsoft-com:office:office" xmlns:v="urn:schemas-microsoft-com:vml" xmlns:pvml="urn:schemas-microsoft-com:office:powerpoint" xmlns:com="http://schemas.openxmlformats.org/drawingml/2006/compatibility" xmlns:p14="http://schemas.microsoft.com/office/powerpoint/2010/main" xmlns:p15="http://schemas.microsoft.com/office/powerpoint/2012/main" xmlns:ahyp="http://schemas.microsoft.com/office/drawing/2018/hyperlinkcolor" xmlns:go="http://customooxmlschemas.google.com/" r:id="rId13" roundtripDataSignature="AMtx7mg8WMx/Q7KB6ZImfuxPZj/si7vz/Q=="/>
+      <go:slidesCustomData xmlns:go="http://customooxmlschemas.google.com/" xmlns:ahyp="http://schemas.microsoft.com/office/drawing/2018/hyperlinkcolor" xmlns:p15="http://schemas.microsoft.com/office/powerpoint/2012/main" xmlns:p14="http://schemas.microsoft.com/office/powerpoint/2010/main" xmlns:com="http://schemas.openxmlformats.org/drawingml/2006/compatibility" xmlns:pvml="urn:schemas-microsoft-com:office:powerpoint" xmlns:v="urn:schemas-microsoft-com:vml" xmlns:o="urn:schemas-microsoft-com:office:office" xmlns:dgm="http://schemas.openxmlformats.org/drawingml/2006/diagram" xmlns:c="http://schemas.openxmlformats.org/drawingml/2006/chart" xmlns:mv="urn:schemas-microsoft-com:mac:vml" xmlns:mc="http://schemas.openxmlformats.org/markup-compatibility/2006" xmlns="" r:id="rId13" roundtripDataSignature="AMtx7mg8WMx/Q7KB6ZImfuxPZj/si7vz/Q=="/>
     </p:ext>
   </p:extLst>
 </p:presentation>
@@ -3512,6 +3512,36 @@
       </p:grpSpPr>
       <p:pic>
         <p:nvPicPr>
+          <p:cNvPr id="4" name="Picture 3">
+            <a:extLst>
+              <a:ext uri="{FF2B5EF4-FFF2-40B4-BE49-F238E27FC236}">
+                <a16:creationId xmlns:a16="http://schemas.microsoft.com/office/drawing/2014/main" id="{A48DBCDA-ABE3-2FBD-6622-EA545F81BFE5}"/>
+              </a:ext>
+            </a:extLst>
+          </p:cNvPr>
+          <p:cNvPicPr>
+            <a:picLocks noChangeAspect="1"/>
+          </p:cNvPicPr>
+          <p:nvPr/>
+        </p:nvPicPr>
+        <p:blipFill>
+          <a:blip r:embed="rId3"/>
+          <a:stretch>
+            <a:fillRect/>
+          </a:stretch>
+        </p:blipFill>
+        <p:spPr>
+          <a:xfrm>
+            <a:off x="1143598" y="2118593"/>
+            <a:ext cx="8865103" cy="8223737"/>
+          </a:xfrm>
+          <a:prstGeom prst="rect">
+            <a:avLst/>
+          </a:prstGeom>
+        </p:spPr>
+      </p:pic>
+      <p:pic>
+        <p:nvPicPr>
           <p:cNvPr id="2" name="Picture 2">
             <a:extLst>
               <a:ext uri="{FF2B5EF4-FFF2-40B4-BE49-F238E27FC236}">
@@ -3525,7 +3555,7 @@
           <p:nvPr/>
         </p:nvPicPr>
         <p:blipFill>
-          <a:blip r:embed="rId3">
+          <a:blip r:embed="rId4">
             <a:extLst>
               <a:ext uri="{28A0092B-C50C-407E-A947-70E740481C1C}">
                 <a14:useLocalDpi xmlns:a14="http://schemas.microsoft.com/office/drawing/2010/main" val="0"/>
@@ -3564,7 +3594,7 @@
           <p:nvPr/>
         </p:nvPicPr>
         <p:blipFill rotWithShape="1">
-          <a:blip r:embed="rId4">
+          <a:blip r:embed="rId5">
             <a:alphaModFix/>
           </a:blip>
           <a:srcRect/>
@@ -3671,7 +3701,7 @@
           <p:nvPr/>
         </p:nvPicPr>
         <p:blipFill rotWithShape="1">
-          <a:blip r:embed="rId5">
+          <a:blip r:embed="rId6">
             <a:alphaModFix/>
           </a:blip>
           <a:srcRect/>
@@ -3698,7 +3728,7 @@
           <p:nvPr/>
         </p:nvPicPr>
         <p:blipFill rotWithShape="1">
-          <a:blip r:embed="rId6">
+          <a:blip r:embed="rId7">
             <a:alphaModFix/>
           </a:blip>
           <a:srcRect/>
@@ -3813,6 +3843,30 @@
               </a:rPr>
               <a:t>Logistic Regression Metrics: </a:t>
             </a:r>
+          </a:p>
+          <a:p>
+            <a:pPr marL="457200" indent="-457200">
+              <a:buFont typeface="Arial" panose="020B0604020202020204" pitchFamily="34" charset="0"/>
+              <a:buChar char="•"/>
+            </a:pPr>
+            <a:r>
+              <a:rPr lang="en-US" sz="3200" b="1" dirty="0">
+                <a:latin typeface="Times New Roman" panose="02020603050405020304" pitchFamily="18" charset="0"/>
+                <a:cs typeface="Times New Roman" panose="02020603050405020304" pitchFamily="18" charset="0"/>
+              </a:rPr>
+              <a:t>P-Value of Interest Rate: </a:t>
+            </a:r>
+            <a:r>
+              <a:rPr lang="en-US" sz="3200" dirty="0">
+                <a:latin typeface="Times New Roman" panose="02020603050405020304" pitchFamily="18" charset="0"/>
+                <a:cs typeface="Times New Roman" panose="02020603050405020304" pitchFamily="18" charset="0"/>
+              </a:rPr>
+              <a:t>Below 0.05. Unlikely the observed relationship occurred by random chance in the data</a:t>
+            </a:r>
+            <a:endParaRPr lang="en-US" sz="3200" b="1" dirty="0">
+              <a:latin typeface="Times New Roman" panose="02020603050405020304" pitchFamily="18" charset="0"/>
+              <a:cs typeface="Times New Roman" panose="02020603050405020304" pitchFamily="18" charset="0"/>
+            </a:endParaRPr>
           </a:p>
           <a:p>
             <a:pPr marL="457200" indent="-457200">
@@ -3864,46 +3918,6 @@
                 <a:latin typeface="Times New Roman" panose="02020603050405020304" pitchFamily="18" charset="0"/>
                 <a:cs typeface="Times New Roman" panose="02020603050405020304" pitchFamily="18" charset="0"/>
               </a:rPr>
-              <a:t>Sensitivity =</a:t>
-            </a:r>
-            <a:r>
-              <a:rPr lang="en-US" sz="3200" dirty="0">
-                <a:latin typeface="Times New Roman" panose="02020603050405020304" pitchFamily="18" charset="0"/>
-                <a:cs typeface="Times New Roman" panose="02020603050405020304" pitchFamily="18" charset="0"/>
-              </a:rPr>
-              <a:t> 54.19%. Slightly above average</a:t>
-            </a:r>
-          </a:p>
-          <a:p>
-            <a:pPr marL="457200" indent="-457200">
-              <a:buFont typeface="Arial" panose="020B0604020202020204" pitchFamily="34" charset="0"/>
-              <a:buChar char="•"/>
-            </a:pPr>
-            <a:r>
-              <a:rPr lang="en-US" sz="3200" b="1" dirty="0">
-                <a:latin typeface="Times New Roman" panose="02020603050405020304" pitchFamily="18" charset="0"/>
-                <a:cs typeface="Times New Roman" panose="02020603050405020304" pitchFamily="18" charset="0"/>
-              </a:rPr>
-              <a:t>Specificity =</a:t>
-            </a:r>
-            <a:r>
-              <a:rPr lang="en-US" sz="3200" dirty="0">
-                <a:latin typeface="Times New Roman" panose="02020603050405020304" pitchFamily="18" charset="0"/>
-                <a:cs typeface="Times New Roman" panose="02020603050405020304" pitchFamily="18" charset="0"/>
-              </a:rPr>
-              <a:t> 95.32%. This is a high perhaps because the method is a logistic regression </a:t>
-            </a:r>
-          </a:p>
-          <a:p>
-            <a:pPr marL="457200" indent="-457200">
-              <a:buFont typeface="Arial" panose="020B0604020202020204" pitchFamily="34" charset="0"/>
-              <a:buChar char="•"/>
-            </a:pPr>
-            <a:r>
-              <a:rPr lang="en-US" sz="3200" b="1" dirty="0">
-                <a:latin typeface="Times New Roman" panose="02020603050405020304" pitchFamily="18" charset="0"/>
-                <a:cs typeface="Times New Roman" panose="02020603050405020304" pitchFamily="18" charset="0"/>
-              </a:rPr>
               <a:t>AUC</a:t>
             </a:r>
             <a:r>
@@ -3983,36 +3997,6 @@
           </a:p>
         </p:txBody>
       </p:sp>
-      <p:pic>
-        <p:nvPicPr>
-          <p:cNvPr id="6" name="Picture 5">
-            <a:extLst>
-              <a:ext uri="{FF2B5EF4-FFF2-40B4-BE49-F238E27FC236}">
-                <a16:creationId xmlns:a16="http://schemas.microsoft.com/office/drawing/2014/main" id="{134278B7-FA47-C82E-A20D-3B59F305F1B9}"/>
-              </a:ext>
-            </a:extLst>
-          </p:cNvPr>
-          <p:cNvPicPr>
-            <a:picLocks noChangeAspect="1"/>
-          </p:cNvPicPr>
-          <p:nvPr/>
-        </p:nvPicPr>
-        <p:blipFill>
-          <a:blip r:embed="rId7"/>
-          <a:stretch>
-            <a:fillRect/>
-          </a:stretch>
-        </p:blipFill>
-        <p:spPr>
-          <a:xfrm>
-            <a:off x="1106076" y="2090908"/>
-            <a:ext cx="8865103" cy="8400740"/>
-          </a:xfrm>
-          <a:prstGeom prst="rect">
-            <a:avLst/>
-          </a:prstGeom>
-        </p:spPr>
-      </p:pic>
       <p:pic>
         <p:nvPicPr>
           <p:cNvPr id="10" name="Picture 9">
@@ -4623,10 +4607,10 @@
       </p:sp>
       <p:pic>
         <p:nvPicPr>
-          <p:cNvPr id="12" name="Picture 11">
-            <a:extLst>
-              <a:ext uri="{FF2B5EF4-FFF2-40B4-BE49-F238E27FC236}">
-                <a16:creationId xmlns:a16="http://schemas.microsoft.com/office/drawing/2014/main" id="{6ACEBC88-7765-E355-7B40-83763E49CEBA}"/>
+          <p:cNvPr id="6" name="Picture 5">
+            <a:extLst>
+              <a:ext uri="{FF2B5EF4-FFF2-40B4-BE49-F238E27FC236}">
+                <a16:creationId xmlns:a16="http://schemas.microsoft.com/office/drawing/2014/main" id="{5ABDE79D-E58A-D5CA-95FD-C9BBE5DDB763}"/>
               </a:ext>
             </a:extLst>
           </p:cNvPr>
@@ -4643,8 +4627,8 @@
         </p:blipFill>
         <p:spPr>
           <a:xfrm>
-            <a:off x="1062205" y="2719891"/>
-            <a:ext cx="9509344" cy="7047962"/>
+            <a:off x="1062205" y="2671545"/>
+            <a:ext cx="9054933" cy="6794129"/>
           </a:xfrm>
           <a:prstGeom prst="rect">
             <a:avLst/>
@@ -4689,6 +4673,36 @@
       </p:grpSpPr>
       <p:pic>
         <p:nvPicPr>
+          <p:cNvPr id="4" name="Picture 3">
+            <a:extLst>
+              <a:ext uri="{FF2B5EF4-FFF2-40B4-BE49-F238E27FC236}">
+                <a16:creationId xmlns:a16="http://schemas.microsoft.com/office/drawing/2014/main" id="{71A22F33-83BA-937B-CA34-807D32BC8081}"/>
+              </a:ext>
+            </a:extLst>
+          </p:cNvPr>
+          <p:cNvPicPr>
+            <a:picLocks noChangeAspect="1"/>
+          </p:cNvPicPr>
+          <p:nvPr/>
+        </p:nvPicPr>
+        <p:blipFill>
+          <a:blip r:embed="rId3"/>
+          <a:stretch>
+            <a:fillRect/>
+          </a:stretch>
+        </p:blipFill>
+        <p:spPr>
+          <a:xfrm>
+            <a:off x="9578196" y="3944419"/>
+            <a:ext cx="10506630" cy="7012738"/>
+          </a:xfrm>
+          <a:prstGeom prst="rect">
+            <a:avLst/>
+          </a:prstGeom>
+        </p:spPr>
+      </p:pic>
+      <p:pic>
+        <p:nvPicPr>
           <p:cNvPr id="2" name="Picture 2">
             <a:extLst>
               <a:ext uri="{FF2B5EF4-FFF2-40B4-BE49-F238E27FC236}">
@@ -4702,7 +4716,7 @@
           <p:nvPr/>
         </p:nvPicPr>
         <p:blipFill>
-          <a:blip r:embed="rId3">
+          <a:blip r:embed="rId4">
             <a:extLst>
               <a:ext uri="{28A0092B-C50C-407E-A947-70E740481C1C}">
                 <a14:useLocalDpi xmlns:a14="http://schemas.microsoft.com/office/drawing/2010/main" val="0"/>
@@ -4747,7 +4761,7 @@
           <p:nvPr/>
         </p:nvPicPr>
         <p:blipFill rotWithShape="1">
-          <a:blip r:embed="rId4">
+          <a:blip r:embed="rId5">
             <a:alphaModFix/>
           </a:blip>
           <a:srcRect/>
@@ -4872,7 +4886,7 @@
           <p:nvPr/>
         </p:nvPicPr>
         <p:blipFill rotWithShape="1">
-          <a:blip r:embed="rId5">
+          <a:blip r:embed="rId6">
             <a:alphaModFix/>
           </a:blip>
           <a:srcRect/>
@@ -4905,7 +4919,7 @@
           <p:nvPr/>
         </p:nvPicPr>
         <p:blipFill rotWithShape="1">
-          <a:blip r:embed="rId6">
+          <a:blip r:embed="rId7">
             <a:alphaModFix/>
           </a:blip>
           <a:srcRect/>
@@ -5162,36 +5176,6 @@
           </a:p>
         </p:txBody>
       </p:sp>
-      <p:pic>
-        <p:nvPicPr>
-          <p:cNvPr id="6" name="Picture 5">
-            <a:extLst>
-              <a:ext uri="{FF2B5EF4-FFF2-40B4-BE49-F238E27FC236}">
-                <a16:creationId xmlns:a16="http://schemas.microsoft.com/office/drawing/2014/main" id="{69905E92-678A-E79A-8DCB-F4336D1C7D4A}"/>
-              </a:ext>
-            </a:extLst>
-          </p:cNvPr>
-          <p:cNvPicPr>
-            <a:picLocks noChangeAspect="1"/>
-          </p:cNvPicPr>
-          <p:nvPr/>
-        </p:nvPicPr>
-        <p:blipFill>
-          <a:blip r:embed="rId7"/>
-          <a:stretch>
-            <a:fillRect/>
-          </a:stretch>
-        </p:blipFill>
-        <p:spPr>
-          <a:xfrm>
-            <a:off x="9191565" y="4012320"/>
-            <a:ext cx="10507792" cy="7038238"/>
-          </a:xfrm>
-          <a:prstGeom prst="rect">
-            <a:avLst/>
-          </a:prstGeom>
-        </p:spPr>
-      </p:pic>
     </p:spTree>
     <p:extLst>
       <p:ext uri="{BB962C8B-B14F-4D97-AF65-F5344CB8AC3E}">
